--- a/Presentation stage 1 brûlé quentin.pptx
+++ b/Presentation stage 1 brûlé quentin.pptx
@@ -122,26 +122,709 @@
 <file path=ppt/changesInfos/changesInfo1.xml><?xml version="1.0" encoding="utf-8"?>
 <pc:chgInfo xmlns:a="http://schemas.openxmlformats.org/drawingml/2006/main" xmlns:r="http://schemas.openxmlformats.org/officeDocument/2006/relationships" xmlns:ac="http://schemas.microsoft.com/office/drawing/2013/main/command" xmlns:pc="http://schemas.microsoft.com/office/powerpoint/2013/main/command">
   <pc:docChgLst>
-    <pc:chgData name="poke 953" userId="c913613eb4ac0ae9" providerId="Windows Live" clId="Web-{120B2B6B-CC6C-494C-8ABA-7C2200B463BC}"/>
-    <pc:docChg chg="modSld">
-      <pc:chgData name="poke 953" userId="c913613eb4ac0ae9" providerId="Windows Live" clId="Web-{120B2B6B-CC6C-494C-8ABA-7C2200B463BC}" dt="2025-11-16T18:10:13.376" v="3"/>
+    <pc:chgData name="poke 953" userId="c913613eb4ac0ae9" providerId="Windows Live" clId="Web-{91ED1F58-71F7-4F28-826F-FBE41EECC278}"/>
+    <pc:docChg chg="addSld modSld addMainMaster delMainMaster">
+      <pc:chgData name="poke 953" userId="c913613eb4ac0ae9" providerId="Windows Live" clId="Web-{91ED1F58-71F7-4F28-826F-FBE41EECC278}" dt="2025-11-16T12:35:43.169" v="63" actId="20577"/>
       <pc:docMkLst>
         <pc:docMk/>
       </pc:docMkLst>
-      <pc:sldChg chg="addSp delSp modSp">
-        <pc:chgData name="poke 953" userId="c913613eb4ac0ae9" providerId="Windows Live" clId="Web-{120B2B6B-CC6C-494C-8ABA-7C2200B463BC}" dt="2025-11-16T18:10:13.376" v="3"/>
+      <pc:sldChg chg="addSp delSp modSp mod setBg modClrScheme chgLayout">
+        <pc:chgData name="poke 953" userId="c913613eb4ac0ae9" providerId="Windows Live" clId="Web-{91ED1F58-71F7-4F28-826F-FBE41EECC278}" dt="2025-11-16T12:29:46.192" v="46"/>
         <pc:sldMkLst>
           <pc:docMk/>
           <pc:sldMk cId="3784089036" sldId="256"/>
         </pc:sldMkLst>
-        <pc:picChg chg="add del">
-          <ac:chgData name="poke 953" userId="c913613eb4ac0ae9" providerId="Windows Live" clId="Web-{120B2B6B-CC6C-494C-8ABA-7C2200B463BC}" dt="2025-11-16T18:10:13.376" v="3"/>
+        <pc:spChg chg="mod">
+          <ac:chgData name="poke 953" userId="c913613eb4ac0ae9" providerId="Windows Live" clId="Web-{91ED1F58-71F7-4F28-826F-FBE41EECC278}" dt="2025-11-16T12:29:46.192" v="46"/>
+          <ac:spMkLst>
+            <pc:docMk/>
+            <pc:sldMk cId="3784089036" sldId="256"/>
+            <ac:spMk id="2" creationId="{00000000-0000-0000-0000-000000000000}"/>
+          </ac:spMkLst>
+        </pc:spChg>
+        <pc:spChg chg="mod">
+          <ac:chgData name="poke 953" userId="c913613eb4ac0ae9" providerId="Windows Live" clId="Web-{91ED1F58-71F7-4F28-826F-FBE41EECC278}" dt="2025-11-16T12:29:46.192" v="46"/>
+          <ac:spMkLst>
+            <pc:docMk/>
+            <pc:sldMk cId="3784089036" sldId="256"/>
+            <ac:spMk id="3" creationId="{00000000-0000-0000-0000-000000000000}"/>
+          </ac:spMkLst>
+        </pc:spChg>
+        <pc:spChg chg="add">
+          <ac:chgData name="poke 953" userId="c913613eb4ac0ae9" providerId="Windows Live" clId="Web-{91ED1F58-71F7-4F28-826F-FBE41EECC278}" dt="2025-11-16T12:29:46.192" v="46"/>
+          <ac:spMkLst>
+            <pc:docMk/>
+            <pc:sldMk cId="3784089036" sldId="256"/>
+            <ac:spMk id="26" creationId="{5AB5C7EE-A919-646B-4F86-BACCBC52D961}"/>
+          </ac:spMkLst>
+        </pc:spChg>
+        <pc:picChg chg="add mod">
+          <ac:chgData name="poke 953" userId="c913613eb4ac0ae9" providerId="Windows Live" clId="Web-{91ED1F58-71F7-4F28-826F-FBE41EECC278}" dt="2025-11-16T12:29:46.192" v="46"/>
           <ac:picMkLst>
             <pc:docMk/>
             <pc:sldMk cId="3784089036" sldId="256"/>
             <ac:picMk id="7" creationId="{817B14CB-F517-2354-C706-4F1E24537EEE}"/>
           </ac:picMkLst>
         </pc:picChg>
+      </pc:sldChg>
+      <pc:sldChg chg="modSp new">
+        <pc:chgData name="poke 953" userId="c913613eb4ac0ae9" providerId="Windows Live" clId="Web-{91ED1F58-71F7-4F28-826F-FBE41EECC278}" dt="2025-11-16T12:35:43.169" v="63" actId="20577"/>
+        <pc:sldMkLst>
+          <pc:docMk/>
+          <pc:sldMk cId="2033124443" sldId="257"/>
+        </pc:sldMkLst>
+        <pc:spChg chg="mod">
+          <ac:chgData name="poke 953" userId="c913613eb4ac0ae9" providerId="Windows Live" clId="Web-{91ED1F58-71F7-4F28-826F-FBE41EECC278}" dt="2025-11-16T12:31:10.551" v="54" actId="20577"/>
+          <ac:spMkLst>
+            <pc:docMk/>
+            <pc:sldMk cId="2033124443" sldId="257"/>
+            <ac:spMk id="2" creationId="{740ACF3C-B2D9-532F-C66D-85A75663C67A}"/>
+          </ac:spMkLst>
+        </pc:spChg>
+        <pc:spChg chg="mod">
+          <ac:chgData name="poke 953" userId="c913613eb4ac0ae9" providerId="Windows Live" clId="Web-{91ED1F58-71F7-4F28-826F-FBE41EECC278}" dt="2025-11-16T12:35:43.169" v="63" actId="20577"/>
+          <ac:spMkLst>
+            <pc:docMk/>
+            <pc:sldMk cId="2033124443" sldId="257"/>
+            <ac:spMk id="3" creationId="{945BE91C-4C09-6560-3210-225079A56955}"/>
+          </ac:spMkLst>
+        </pc:spChg>
+      </pc:sldChg>
+      <pc:sldMasterChg chg="add replId addSldLayout">
+        <pc:chgData name="poke 953" userId="c913613eb4ac0ae9" providerId="Windows Live" clId="Web-{91ED1F58-71F7-4F28-826F-FBE41EECC278}" dt="2025-11-16T12:18:55.781" v="35"/>
+        <pc:sldMasterMkLst>
+          <pc:docMk/>
+          <pc:sldMasterMk cId="1920457781" sldId="2147483660"/>
+        </pc:sldMasterMkLst>
+        <pc:sldLayoutChg chg="add">
+          <pc:chgData name="poke 953" userId="c913613eb4ac0ae9" providerId="Windows Live" clId="Web-{91ED1F58-71F7-4F28-826F-FBE41EECC278}" dt="2025-11-16T12:18:55.781" v="35"/>
+          <pc:sldLayoutMkLst>
+            <pc:docMk/>
+            <pc:sldMasterMk cId="1920457781" sldId="2147483660"/>
+            <pc:sldLayoutMk cId="2105446793" sldId="2147483661"/>
+          </pc:sldLayoutMkLst>
+        </pc:sldLayoutChg>
+        <pc:sldLayoutChg chg="add replId">
+          <pc:chgData name="poke 953" userId="c913613eb4ac0ae9" providerId="Windows Live" clId="Web-{91ED1F58-71F7-4F28-826F-FBE41EECC278}" dt="2025-11-16T12:18:55.781" v="35"/>
+          <pc:sldLayoutMkLst>
+            <pc:docMk/>
+            <pc:sldMasterMk cId="1920457781" sldId="2147483660"/>
+            <pc:sldLayoutMk cId="3530714011" sldId="2147483662"/>
+          </pc:sldLayoutMkLst>
+        </pc:sldLayoutChg>
+        <pc:sldLayoutChg chg="add replId">
+          <pc:chgData name="poke 953" userId="c913613eb4ac0ae9" providerId="Windows Live" clId="Web-{91ED1F58-71F7-4F28-826F-FBE41EECC278}" dt="2025-11-16T12:18:55.781" v="35"/>
+          <pc:sldLayoutMkLst>
+            <pc:docMk/>
+            <pc:sldMasterMk cId="1920457781" sldId="2147483660"/>
+            <pc:sldLayoutMk cId="3555182978" sldId="2147483663"/>
+          </pc:sldLayoutMkLst>
+        </pc:sldLayoutChg>
+        <pc:sldLayoutChg chg="add replId">
+          <pc:chgData name="poke 953" userId="c913613eb4ac0ae9" providerId="Windows Live" clId="Web-{91ED1F58-71F7-4F28-826F-FBE41EECC278}" dt="2025-11-16T12:18:55.781" v="35"/>
+          <pc:sldLayoutMkLst>
+            <pc:docMk/>
+            <pc:sldMasterMk cId="1920457781" sldId="2147483660"/>
+            <pc:sldLayoutMk cId="331114366" sldId="2147483664"/>
+          </pc:sldLayoutMkLst>
+        </pc:sldLayoutChg>
+        <pc:sldLayoutChg chg="add replId">
+          <pc:chgData name="poke 953" userId="c913613eb4ac0ae9" providerId="Windows Live" clId="Web-{91ED1F58-71F7-4F28-826F-FBE41EECC278}" dt="2025-11-16T12:18:55.781" v="35"/>
+          <pc:sldLayoutMkLst>
+            <pc:docMk/>
+            <pc:sldMasterMk cId="1920457781" sldId="2147483660"/>
+            <pc:sldLayoutMk cId="1512560825" sldId="2147483665"/>
+          </pc:sldLayoutMkLst>
+        </pc:sldLayoutChg>
+        <pc:sldLayoutChg chg="add replId">
+          <pc:chgData name="poke 953" userId="c913613eb4ac0ae9" providerId="Windows Live" clId="Web-{91ED1F58-71F7-4F28-826F-FBE41EECC278}" dt="2025-11-16T12:18:55.781" v="35"/>
+          <pc:sldLayoutMkLst>
+            <pc:docMk/>
+            <pc:sldMasterMk cId="1920457781" sldId="2147483660"/>
+            <pc:sldLayoutMk cId="3239021891" sldId="2147483666"/>
+          </pc:sldLayoutMkLst>
+        </pc:sldLayoutChg>
+        <pc:sldLayoutChg chg="add replId">
+          <pc:chgData name="poke 953" userId="c913613eb4ac0ae9" providerId="Windows Live" clId="Web-{91ED1F58-71F7-4F28-826F-FBE41EECC278}" dt="2025-11-16T12:18:55.781" v="35"/>
+          <pc:sldLayoutMkLst>
+            <pc:docMk/>
+            <pc:sldMasterMk cId="1920457781" sldId="2147483660"/>
+            <pc:sldLayoutMk cId="1919877203" sldId="2147483667"/>
+          </pc:sldLayoutMkLst>
+        </pc:sldLayoutChg>
+        <pc:sldLayoutChg chg="add replId">
+          <pc:chgData name="poke 953" userId="c913613eb4ac0ae9" providerId="Windows Live" clId="Web-{91ED1F58-71F7-4F28-826F-FBE41EECC278}" dt="2025-11-16T12:18:55.781" v="35"/>
+          <pc:sldLayoutMkLst>
+            <pc:docMk/>
+            <pc:sldMasterMk cId="1920457781" sldId="2147483660"/>
+            <pc:sldLayoutMk cId="590519224" sldId="2147483668"/>
+          </pc:sldLayoutMkLst>
+        </pc:sldLayoutChg>
+        <pc:sldLayoutChg chg="add replId">
+          <pc:chgData name="poke 953" userId="c913613eb4ac0ae9" providerId="Windows Live" clId="Web-{91ED1F58-71F7-4F28-826F-FBE41EECC278}" dt="2025-11-16T12:18:55.781" v="35"/>
+          <pc:sldLayoutMkLst>
+            <pc:docMk/>
+            <pc:sldMasterMk cId="1920457781" sldId="2147483660"/>
+            <pc:sldLayoutMk cId="3081640658" sldId="2147483669"/>
+          </pc:sldLayoutMkLst>
+        </pc:sldLayoutChg>
+        <pc:sldLayoutChg chg="add replId">
+          <pc:chgData name="poke 953" userId="c913613eb4ac0ae9" providerId="Windows Live" clId="Web-{91ED1F58-71F7-4F28-826F-FBE41EECC278}" dt="2025-11-16T12:18:55.781" v="35"/>
+          <pc:sldLayoutMkLst>
+            <pc:docMk/>
+            <pc:sldMasterMk cId="1920457781" sldId="2147483660"/>
+            <pc:sldLayoutMk cId="1897910840" sldId="2147483670"/>
+          </pc:sldLayoutMkLst>
+        </pc:sldLayoutChg>
+        <pc:sldLayoutChg chg="add replId">
+          <pc:chgData name="poke 953" userId="c913613eb4ac0ae9" providerId="Windows Live" clId="Web-{91ED1F58-71F7-4F28-826F-FBE41EECC278}" dt="2025-11-16T12:18:55.781" v="35"/>
+          <pc:sldLayoutMkLst>
+            <pc:docMk/>
+            <pc:sldMasterMk cId="1920457781" sldId="2147483660"/>
+            <pc:sldLayoutMk cId="240778695" sldId="2147483671"/>
+          </pc:sldLayoutMkLst>
+        </pc:sldLayoutChg>
+      </pc:sldMasterChg>
+    </pc:docChg>
+  </pc:docChgLst>
+  <pc:docChgLst>
+    <pc:chgData name="poke 953" userId="c913613eb4ac0ae9" providerId="LiveId" clId="{99A484BB-246A-43CA-AFF2-5AFF2003EEDE}"/>
+    <pc:docChg chg="undo custSel delSld modSld">
+      <pc:chgData name="poke 953" userId="c913613eb4ac0ae9" providerId="LiveId" clId="{99A484BB-246A-43CA-AFF2-5AFF2003EEDE}" dt="2026-04-26T11:17:59.441" v="54" actId="47"/>
+      <pc:docMkLst>
+        <pc:docMk/>
+      </pc:docMkLst>
+      <pc:sldChg chg="addSp delSp modSp mod">
+        <pc:chgData name="poke 953" userId="c913613eb4ac0ae9" providerId="LiveId" clId="{99A484BB-246A-43CA-AFF2-5AFF2003EEDE}" dt="2026-04-26T11:17:05.784" v="44" actId="115"/>
+        <pc:sldMkLst>
+          <pc:docMk/>
+          <pc:sldMk cId="584521698" sldId="259"/>
+        </pc:sldMkLst>
+        <pc:spChg chg="add mod">
+          <ac:chgData name="poke 953" userId="c913613eb4ac0ae9" providerId="LiveId" clId="{99A484BB-246A-43CA-AFF2-5AFF2003EEDE}" dt="2026-04-26T11:17:05.784" v="44" actId="115"/>
+          <ac:spMkLst>
+            <pc:docMk/>
+            <pc:sldMk cId="584521698" sldId="259"/>
+            <ac:spMk id="2" creationId="{DD095861-E5D7-96FB-BD81-532D0CFD3981}"/>
+          </ac:spMkLst>
+        </pc:spChg>
+        <pc:spChg chg="add">
+          <ac:chgData name="poke 953" userId="c913613eb4ac0ae9" providerId="LiveId" clId="{99A484BB-246A-43CA-AFF2-5AFF2003EEDE}" dt="2026-04-26T11:16:57.804" v="40" actId="11529"/>
+          <ac:spMkLst>
+            <pc:docMk/>
+            <pc:sldMk cId="584521698" sldId="259"/>
+            <ac:spMk id="3" creationId="{D028D9CC-D96B-C117-133B-D07CE764D544}"/>
+          </ac:spMkLst>
+        </pc:spChg>
+        <pc:spChg chg="mod">
+          <ac:chgData name="poke 953" userId="c913613eb4ac0ae9" providerId="LiveId" clId="{99A484BB-246A-43CA-AFF2-5AFF2003EEDE}" dt="2026-04-26T11:16:04.924" v="28" actId="13822"/>
+          <ac:spMkLst>
+            <pc:docMk/>
+            <pc:sldMk cId="584521698" sldId="259"/>
+            <ac:spMk id="19" creationId="{F08CE3D1-06CB-E4CC-9949-427DC8B5B99D}"/>
+          </ac:spMkLst>
+        </pc:spChg>
+        <pc:spChg chg="mod">
+          <ac:chgData name="poke 953" userId="c913613eb4ac0ae9" providerId="LiveId" clId="{99A484BB-246A-43CA-AFF2-5AFF2003EEDE}" dt="2026-04-26T11:16:11.574" v="30" actId="13822"/>
+          <ac:spMkLst>
+            <pc:docMk/>
+            <pc:sldMk cId="584521698" sldId="259"/>
+            <ac:spMk id="20" creationId="{05504AAE-F4A5-8EF9-061A-310B48D74CF4}"/>
+          </ac:spMkLst>
+        </pc:spChg>
+        <pc:spChg chg="mod">
+          <ac:chgData name="poke 953" userId="c913613eb4ac0ae9" providerId="LiveId" clId="{99A484BB-246A-43CA-AFF2-5AFF2003EEDE}" dt="2026-04-26T11:16:02.734" v="27" actId="13822"/>
+          <ac:spMkLst>
+            <pc:docMk/>
+            <pc:sldMk cId="584521698" sldId="259"/>
+            <ac:spMk id="21" creationId="{07A60E84-9785-6DB5-4B60-89492BE2BEB1}"/>
+          </ac:spMkLst>
+        </pc:spChg>
+        <pc:spChg chg="mod">
+          <ac:chgData name="poke 953" userId="c913613eb4ac0ae9" providerId="LiveId" clId="{99A484BB-246A-43CA-AFF2-5AFF2003EEDE}" dt="2026-04-26T11:16:13.173" v="32" actId="13822"/>
+          <ac:spMkLst>
+            <pc:docMk/>
+            <pc:sldMk cId="584521698" sldId="259"/>
+            <ac:spMk id="22" creationId="{F0F98BCC-1204-FBA5-35C1-FFC2B1A33165}"/>
+          </ac:spMkLst>
+        </pc:spChg>
+        <pc:spChg chg="mod">
+          <ac:chgData name="poke 953" userId="c913613eb4ac0ae9" providerId="LiveId" clId="{99A484BB-246A-43CA-AFF2-5AFF2003EEDE}" dt="2026-04-26T11:16:14.794" v="33" actId="13822"/>
+          <ac:spMkLst>
+            <pc:docMk/>
+            <pc:sldMk cId="584521698" sldId="259"/>
+            <ac:spMk id="23" creationId="{75F96745-7FEF-FD4B-D974-815AC385C719}"/>
+          </ac:spMkLst>
+        </pc:spChg>
+        <pc:spChg chg="mod">
+          <ac:chgData name="poke 953" userId="c913613eb4ac0ae9" providerId="LiveId" clId="{99A484BB-246A-43CA-AFF2-5AFF2003EEDE}" dt="2026-04-26T11:16:16.064" v="34" actId="13822"/>
+          <ac:spMkLst>
+            <pc:docMk/>
+            <pc:sldMk cId="584521698" sldId="259"/>
+            <ac:spMk id="24" creationId="{EE7DCDB7-047F-0CE6-BF01-98DD7B29C22A}"/>
+          </ac:spMkLst>
+        </pc:spChg>
+        <pc:spChg chg="del mod">
+          <ac:chgData name="poke 953" userId="c913613eb4ac0ae9" providerId="LiveId" clId="{99A484BB-246A-43CA-AFF2-5AFF2003EEDE}" dt="2026-04-26T11:15:44.385" v="24"/>
+          <ac:spMkLst>
+            <pc:docMk/>
+            <pc:sldMk cId="584521698" sldId="259"/>
+            <ac:spMk id="34" creationId="{C4C1A6B8-54BC-4FE0-073A-70232EFC168D}"/>
+          </ac:spMkLst>
+        </pc:spChg>
+      </pc:sldChg>
+      <pc:sldChg chg="addSp modSp mod modNotesTx">
+        <pc:chgData name="poke 953" userId="c913613eb4ac0ae9" providerId="LiveId" clId="{99A484BB-246A-43CA-AFF2-5AFF2003EEDE}" dt="2026-04-26T11:17:50.381" v="52"/>
+        <pc:sldMkLst>
+          <pc:docMk/>
+          <pc:sldMk cId="3556524927" sldId="261"/>
+        </pc:sldMkLst>
+        <pc:spChg chg="mod">
+          <ac:chgData name="poke 953" userId="c913613eb4ac0ae9" providerId="LiveId" clId="{99A484BB-246A-43CA-AFF2-5AFF2003EEDE}" dt="2026-04-26T11:17:12.770" v="45" actId="20577"/>
+          <ac:spMkLst>
+            <pc:docMk/>
+            <pc:sldMk cId="3556524927" sldId="261"/>
+            <ac:spMk id="3" creationId="{D654BA91-BAEA-6714-9F84-0F10234AA0BD}"/>
+          </ac:spMkLst>
+        </pc:spChg>
+        <pc:spChg chg="add mod">
+          <ac:chgData name="poke 953" userId="c913613eb4ac0ae9" providerId="LiveId" clId="{99A484BB-246A-43CA-AFF2-5AFF2003EEDE}" dt="2026-04-26T11:17:35.326" v="48"/>
+          <ac:spMkLst>
+            <pc:docMk/>
+            <pc:sldMk cId="3556524927" sldId="261"/>
+            <ac:spMk id="4" creationId="{5D39E20B-EE24-1DBB-C4FB-ABE45F7FCF8E}"/>
+          </ac:spMkLst>
+        </pc:spChg>
+        <pc:spChg chg="add mod">
+          <ac:chgData name="poke 953" userId="c913613eb4ac0ae9" providerId="LiveId" clId="{99A484BB-246A-43CA-AFF2-5AFF2003EEDE}" dt="2026-04-26T11:17:35.326" v="48"/>
+          <ac:spMkLst>
+            <pc:docMk/>
+            <pc:sldMk cId="3556524927" sldId="261"/>
+            <ac:spMk id="5" creationId="{D654BA91-BAEA-6714-9F84-0F10234AA0BD}"/>
+          </ac:spMkLst>
+        </pc:spChg>
+      </pc:sldChg>
+      <pc:sldChg chg="del">
+        <pc:chgData name="poke 953" userId="c913613eb4ac0ae9" providerId="LiveId" clId="{99A484BB-246A-43CA-AFF2-5AFF2003EEDE}" dt="2026-04-26T11:17:59.441" v="54" actId="47"/>
+        <pc:sldMkLst>
+          <pc:docMk/>
+          <pc:sldMk cId="2328205133" sldId="263"/>
+        </pc:sldMkLst>
+      </pc:sldChg>
+      <pc:sldChg chg="addSp delSp modSp del mod">
+        <pc:chgData name="poke 953" userId="c913613eb4ac0ae9" providerId="LiveId" clId="{99A484BB-246A-43CA-AFF2-5AFF2003EEDE}" dt="2026-04-26T11:17:53.539" v="53" actId="47"/>
+        <pc:sldMkLst>
+          <pc:docMk/>
+          <pc:sldMk cId="3481839793" sldId="265"/>
+        </pc:sldMkLst>
+        <pc:spChg chg="add del">
+          <ac:chgData name="poke 953" userId="c913613eb4ac0ae9" providerId="LiveId" clId="{99A484BB-246A-43CA-AFF2-5AFF2003EEDE}" dt="2026-04-26T11:17:35.890" v="49" actId="21"/>
+          <ac:spMkLst>
+            <pc:docMk/>
+            <pc:sldMk cId="3481839793" sldId="265"/>
+            <ac:spMk id="2" creationId="{5D39E20B-EE24-1DBB-C4FB-ABE45F7FCF8E}"/>
+          </ac:spMkLst>
+        </pc:spChg>
+        <pc:spChg chg="add del">
+          <ac:chgData name="poke 953" userId="c913613eb4ac0ae9" providerId="LiveId" clId="{99A484BB-246A-43CA-AFF2-5AFF2003EEDE}" dt="2026-04-26T11:17:35.890" v="49" actId="21"/>
+          <ac:spMkLst>
+            <pc:docMk/>
+            <pc:sldMk cId="3481839793" sldId="265"/>
+            <ac:spMk id="3" creationId="{D654BA91-BAEA-6714-9F84-0F10234AA0BD}"/>
+          </ac:spMkLst>
+        </pc:spChg>
+        <pc:spChg chg="add del mod">
+          <ac:chgData name="poke 953" userId="c913613eb4ac0ae9" providerId="LiveId" clId="{99A484BB-246A-43CA-AFF2-5AFF2003EEDE}" dt="2026-04-26T11:17:35.890" v="49" actId="21"/>
+          <ac:spMkLst>
+            <pc:docMk/>
+            <pc:sldMk cId="3481839793" sldId="265"/>
+            <ac:spMk id="5" creationId="{5FDB4397-65B3-A0BF-E415-AFB4FCC30659}"/>
+          </ac:spMkLst>
+        </pc:spChg>
+        <pc:spChg chg="add del mod">
+          <ac:chgData name="poke 953" userId="c913613eb4ac0ae9" providerId="LiveId" clId="{99A484BB-246A-43CA-AFF2-5AFF2003EEDE}" dt="2026-04-26T11:17:35.890" v="49" actId="21"/>
+          <ac:spMkLst>
+            <pc:docMk/>
+            <pc:sldMk cId="3481839793" sldId="265"/>
+            <ac:spMk id="7" creationId="{5341403F-D77F-C0B8-4DA6-C99422A440B2}"/>
+          </ac:spMkLst>
+        </pc:spChg>
+      </pc:sldChg>
+    </pc:docChg>
+  </pc:docChgLst>
+  <pc:docChgLst>
+    <pc:chgData name="poke 953" userId="c913613eb4ac0ae9" providerId="Windows Live" clId="Web-{5D32DB45-B68A-408A-913F-78C085A6EE4A}"/>
+    <pc:docChg chg="addSld modSld">
+      <pc:chgData name="poke 953" userId="c913613eb4ac0ae9" providerId="Windows Live" clId="Web-{5D32DB45-B68A-408A-913F-78C085A6EE4A}" dt="2025-11-18T14:07:58.322" v="456" actId="20577"/>
+      <pc:docMkLst>
+        <pc:docMk/>
+      </pc:docMkLst>
+      <pc:sldChg chg="addSp modSp">
+        <pc:chgData name="poke 953" userId="c913613eb4ac0ae9" providerId="Windows Live" clId="Web-{5D32DB45-B68A-408A-913F-78C085A6EE4A}" dt="2025-11-18T13:08:33.912" v="96" actId="20577"/>
+        <pc:sldMkLst>
+          <pc:docMk/>
+          <pc:sldMk cId="621877034" sldId="258"/>
+        </pc:sldMkLst>
+        <pc:spChg chg="add mod">
+          <ac:chgData name="poke 953" userId="c913613eb4ac0ae9" providerId="Windows Live" clId="Web-{5D32DB45-B68A-408A-913F-78C085A6EE4A}" dt="2025-11-18T13:08:33.912" v="96" actId="20577"/>
+          <ac:spMkLst>
+            <pc:docMk/>
+            <pc:sldMk cId="621877034" sldId="258"/>
+            <ac:spMk id="3" creationId="{0064D4A9-5531-B352-83F9-EED5E31A5A44}"/>
+          </ac:spMkLst>
+        </pc:spChg>
+      </pc:sldChg>
+      <pc:sldChg chg="addSp delSp modSp">
+        <pc:chgData name="poke 953" userId="c913613eb4ac0ae9" providerId="Windows Live" clId="Web-{5D32DB45-B68A-408A-913F-78C085A6EE4A}" dt="2025-11-18T13:11:17.398" v="158" actId="20577"/>
+        <pc:sldMkLst>
+          <pc:docMk/>
+          <pc:sldMk cId="1676052078" sldId="260"/>
+        </pc:sldMkLst>
+        <pc:spChg chg="add del">
+          <ac:chgData name="poke 953" userId="c913613eb4ac0ae9" providerId="Windows Live" clId="Web-{5D32DB45-B68A-408A-913F-78C085A6EE4A}" dt="2025-11-18T13:09:16.443" v="98"/>
+          <ac:spMkLst>
+            <pc:docMk/>
+            <pc:sldMk cId="1676052078" sldId="260"/>
+            <ac:spMk id="3" creationId="{636F8841-5F1C-16B1-81B6-2AD020EB730C}"/>
+          </ac:spMkLst>
+        </pc:spChg>
+        <pc:spChg chg="mod">
+          <ac:chgData name="poke 953" userId="c913613eb4ac0ae9" providerId="Windows Live" clId="Web-{5D32DB45-B68A-408A-913F-78C085A6EE4A}" dt="2025-11-18T13:11:17.398" v="158" actId="20577"/>
+          <ac:spMkLst>
+            <pc:docMk/>
+            <pc:sldMk cId="1676052078" sldId="260"/>
+            <ac:spMk id="4" creationId="{CA87834F-FBCC-68E1-540B-B9A576E34975}"/>
+          </ac:spMkLst>
+        </pc:spChg>
+      </pc:sldChg>
+      <pc:sldChg chg="modSp new">
+        <pc:chgData name="poke 953" userId="c913613eb4ac0ae9" providerId="Windows Live" clId="Web-{5D32DB45-B68A-408A-913F-78C085A6EE4A}" dt="2025-11-18T14:06:06.176" v="388" actId="20577"/>
+        <pc:sldMkLst>
+          <pc:docMk/>
+          <pc:sldMk cId="3556524927" sldId="261"/>
+        </pc:sldMkLst>
+        <pc:spChg chg="mod">
+          <ac:chgData name="poke 953" userId="c913613eb4ac0ae9" providerId="Windows Live" clId="Web-{5D32DB45-B68A-408A-913F-78C085A6EE4A}" dt="2025-11-18T13:11:48.852" v="182" actId="20577"/>
+          <ac:spMkLst>
+            <pc:docMk/>
+            <pc:sldMk cId="3556524927" sldId="261"/>
+            <ac:spMk id="2" creationId="{5D39E20B-EE24-1DBB-C4FB-ABE45F7FCF8E}"/>
+          </ac:spMkLst>
+        </pc:spChg>
+        <pc:spChg chg="mod">
+          <ac:chgData name="poke 953" userId="c913613eb4ac0ae9" providerId="Windows Live" clId="Web-{5D32DB45-B68A-408A-913F-78C085A6EE4A}" dt="2025-11-18T14:06:06.176" v="388" actId="20577"/>
+          <ac:spMkLst>
+            <pc:docMk/>
+            <pc:sldMk cId="3556524927" sldId="261"/>
+            <ac:spMk id="3" creationId="{D654BA91-BAEA-6714-9F84-0F10234AA0BD}"/>
+          </ac:spMkLst>
+        </pc:spChg>
+      </pc:sldChg>
+      <pc:sldChg chg="modSp new">
+        <pc:chgData name="poke 953" userId="c913613eb4ac0ae9" providerId="Windows Live" clId="Web-{5D32DB45-B68A-408A-913F-78C085A6EE4A}" dt="2025-11-18T14:07:58.322" v="456" actId="20577"/>
+        <pc:sldMkLst>
+          <pc:docMk/>
+          <pc:sldMk cId="1281333838" sldId="262"/>
+        </pc:sldMkLst>
+        <pc:spChg chg="mod">
+          <ac:chgData name="poke 953" userId="c913613eb4ac0ae9" providerId="Windows Live" clId="Web-{5D32DB45-B68A-408A-913F-78C085A6EE4A}" dt="2025-11-18T14:06:17.989" v="398" actId="20577"/>
+          <ac:spMkLst>
+            <pc:docMk/>
+            <pc:sldMk cId="1281333838" sldId="262"/>
+            <ac:spMk id="2" creationId="{FBDF1928-F70F-82E4-A0B0-FFDBE6E08E62}"/>
+          </ac:spMkLst>
+        </pc:spChg>
+        <pc:spChg chg="mod">
+          <ac:chgData name="poke 953" userId="c913613eb4ac0ae9" providerId="Windows Live" clId="Web-{5D32DB45-B68A-408A-913F-78C085A6EE4A}" dt="2025-11-18T14:07:58.322" v="456" actId="20577"/>
+          <ac:spMkLst>
+            <pc:docMk/>
+            <pc:sldMk cId="1281333838" sldId="262"/>
+            <ac:spMk id="3" creationId="{1B058352-71E4-4527-41C2-97A922754AB3}"/>
+          </ac:spMkLst>
+        </pc:spChg>
+      </pc:sldChg>
+    </pc:docChg>
+  </pc:docChgLst>
+  <pc:docChgLst>
+    <pc:chgData name="poke 953" userId="c913613eb4ac0ae9" providerId="Windows Live" clId="Web-{8ED3E464-459F-4EE1-BF0D-0F3D4528D82B}"/>
+    <pc:docChg chg="modSld">
+      <pc:chgData name="poke 953" userId="c913613eb4ac0ae9" providerId="Windows Live" clId="Web-{8ED3E464-459F-4EE1-BF0D-0F3D4528D82B}" dt="2025-11-19T13:42:47.211" v="55" actId="20577"/>
+      <pc:docMkLst>
+        <pc:docMk/>
+      </pc:docMkLst>
+      <pc:sldChg chg="modSp">
+        <pc:chgData name="poke 953" userId="c913613eb4ac0ae9" providerId="Windows Live" clId="Web-{8ED3E464-459F-4EE1-BF0D-0F3D4528D82B}" dt="2025-11-19T13:42:47.211" v="55" actId="20577"/>
+        <pc:sldMkLst>
+          <pc:docMk/>
+          <pc:sldMk cId="2033124443" sldId="257"/>
+        </pc:sldMkLst>
+        <pc:spChg chg="mod">
+          <ac:chgData name="poke 953" userId="c913613eb4ac0ae9" providerId="Windows Live" clId="Web-{8ED3E464-459F-4EE1-BF0D-0F3D4528D82B}" dt="2025-11-19T13:42:47.211" v="55" actId="20577"/>
+          <ac:spMkLst>
+            <pc:docMk/>
+            <pc:sldMk cId="2033124443" sldId="257"/>
+            <ac:spMk id="3" creationId="{945BE91C-4C09-6560-3210-225079A56955}"/>
+          </ac:spMkLst>
+        </pc:spChg>
+      </pc:sldChg>
+      <pc:sldChg chg="modSp">
+        <pc:chgData name="poke 953" userId="c913613eb4ac0ae9" providerId="Windows Live" clId="Web-{8ED3E464-459F-4EE1-BF0D-0F3D4528D82B}" dt="2025-11-19T07:55:39.203" v="5" actId="20577"/>
+        <pc:sldMkLst>
+          <pc:docMk/>
+          <pc:sldMk cId="1676052078" sldId="260"/>
+        </pc:sldMkLst>
+        <pc:spChg chg="mod">
+          <ac:chgData name="poke 953" userId="c913613eb4ac0ae9" providerId="Windows Live" clId="Web-{8ED3E464-459F-4EE1-BF0D-0F3D4528D82B}" dt="2025-11-19T07:55:39.203" v="5" actId="20577"/>
+          <ac:spMkLst>
+            <pc:docMk/>
+            <pc:sldMk cId="1676052078" sldId="260"/>
+            <ac:spMk id="4" creationId="{CA87834F-FBCC-68E1-540B-B9A576E34975}"/>
+          </ac:spMkLst>
+        </pc:spChg>
+      </pc:sldChg>
+      <pc:sldChg chg="modSp">
+        <pc:chgData name="poke 953" userId="c913613eb4ac0ae9" providerId="Windows Live" clId="Web-{8ED3E464-459F-4EE1-BF0D-0F3D4528D82B}" dt="2025-11-19T08:05:19.398" v="7" actId="20577"/>
+        <pc:sldMkLst>
+          <pc:docMk/>
+          <pc:sldMk cId="3556524927" sldId="261"/>
+        </pc:sldMkLst>
+        <pc:spChg chg="mod">
+          <ac:chgData name="poke 953" userId="c913613eb4ac0ae9" providerId="Windows Live" clId="Web-{8ED3E464-459F-4EE1-BF0D-0F3D4528D82B}" dt="2025-11-19T08:05:19.398" v="7" actId="20577"/>
+          <ac:spMkLst>
+            <pc:docMk/>
+            <pc:sldMk cId="3556524927" sldId="261"/>
+            <ac:spMk id="3" creationId="{D654BA91-BAEA-6714-9F84-0F10234AA0BD}"/>
+          </ac:spMkLst>
+        </pc:spChg>
+      </pc:sldChg>
+    </pc:docChg>
+  </pc:docChgLst>
+  <pc:docChgLst>
+    <pc:chgData name="poke 953" userId="c913613eb4ac0ae9" providerId="Windows Live" clId="Web-{750799B2-6321-41FD-873F-01700368E26C}"/>
+    <pc:docChg chg="addSld modSld">
+      <pc:chgData name="poke 953" userId="c913613eb4ac0ae9" providerId="Windows Live" clId="Web-{750799B2-6321-41FD-873F-01700368E26C}" dt="2025-11-18T00:13:47.795" v="286" actId="1076"/>
+      <pc:docMkLst>
+        <pc:docMk/>
+      </pc:docMkLst>
+      <pc:sldChg chg="modSp">
+        <pc:chgData name="poke 953" userId="c913613eb4ac0ae9" providerId="Windows Live" clId="Web-{750799B2-6321-41FD-873F-01700368E26C}" dt="2025-11-17T23:59:30.707" v="48" actId="20577"/>
+        <pc:sldMkLst>
+          <pc:docMk/>
+          <pc:sldMk cId="2033124443" sldId="257"/>
+        </pc:sldMkLst>
+        <pc:spChg chg="mod">
+          <ac:chgData name="poke 953" userId="c913613eb4ac0ae9" providerId="Windows Live" clId="Web-{750799B2-6321-41FD-873F-01700368E26C}" dt="2025-11-17T23:59:30.707" v="48" actId="20577"/>
+          <ac:spMkLst>
+            <pc:docMk/>
+            <pc:sldMk cId="2033124443" sldId="257"/>
+            <ac:spMk id="3" creationId="{945BE91C-4C09-6560-3210-225079A56955}"/>
+          </ac:spMkLst>
+        </pc:spChg>
+      </pc:sldChg>
+      <pc:sldChg chg="addSp delSp modSp new">
+        <pc:chgData name="poke 953" userId="c913613eb4ac0ae9" providerId="Windows Live" clId="Web-{750799B2-6321-41FD-873F-01700368E26C}" dt="2025-11-18T00:10:29.076" v="223"/>
+        <pc:sldMkLst>
+          <pc:docMk/>
+          <pc:sldMk cId="621877034" sldId="258"/>
+        </pc:sldMkLst>
+        <pc:spChg chg="mod">
+          <ac:chgData name="poke 953" userId="c913613eb4ac0ae9" providerId="Windows Live" clId="Web-{750799B2-6321-41FD-873F-01700368E26C}" dt="2025-11-17T23:59:50.895" v="59" actId="20577"/>
+          <ac:spMkLst>
+            <pc:docMk/>
+            <pc:sldMk cId="621877034" sldId="258"/>
+            <ac:spMk id="2" creationId="{CAF17746-388F-8B24-EAFB-794E17F91460}"/>
+          </ac:spMkLst>
+        </pc:spChg>
+        <pc:spChg chg="del">
+          <ac:chgData name="poke 953" userId="c913613eb4ac0ae9" providerId="Windows Live" clId="Web-{750799B2-6321-41FD-873F-01700368E26C}" dt="2025-11-18T00:08:58.458" v="191"/>
+          <ac:spMkLst>
+            <pc:docMk/>
+            <pc:sldMk cId="621877034" sldId="258"/>
+            <ac:spMk id="3" creationId="{F6FAB79D-4BD6-0C22-ED23-CFCC2E0AEF17}"/>
+          </ac:spMkLst>
+        </pc:spChg>
+        <pc:spChg chg="add del mod">
+          <ac:chgData name="poke 953" userId="c913613eb4ac0ae9" providerId="Windows Live" clId="Web-{750799B2-6321-41FD-873F-01700368E26C}" dt="2025-11-18T00:10:29.076" v="223"/>
+          <ac:spMkLst>
+            <pc:docMk/>
+            <pc:sldMk cId="621877034" sldId="258"/>
+            <ac:spMk id="4" creationId="{CA87834F-FBCC-68E1-540B-B9A576E34975}"/>
+          </ac:spMkLst>
+        </pc:spChg>
+      </pc:sldChg>
+      <pc:sldChg chg="addSp delSp modSp new">
+        <pc:chgData name="poke 953" userId="c913613eb4ac0ae9" providerId="Windows Live" clId="Web-{750799B2-6321-41FD-873F-01700368E26C}" dt="2025-11-18T00:13:47.795" v="286" actId="1076"/>
+        <pc:sldMkLst>
+          <pc:docMk/>
+          <pc:sldMk cId="584521698" sldId="259"/>
+        </pc:sldMkLst>
+        <pc:spChg chg="mod">
+          <ac:chgData name="poke 953" userId="c913613eb4ac0ae9" providerId="Windows Live" clId="Web-{750799B2-6321-41FD-873F-01700368E26C}" dt="2025-11-18T00:13:27.606" v="272" actId="20577"/>
+          <ac:spMkLst>
+            <pc:docMk/>
+            <pc:sldMk cId="584521698" sldId="259"/>
+            <ac:spMk id="2" creationId="{5DFAA439-639D-283E-D639-A85F2E2B2276}"/>
+          </ac:spMkLst>
+        </pc:spChg>
+        <pc:spChg chg="del mod">
+          <ac:chgData name="poke 953" userId="c913613eb4ac0ae9" providerId="Windows Live" clId="Web-{750799B2-6321-41FD-873F-01700368E26C}" dt="2025-11-18T00:08:45.363" v="188"/>
+          <ac:spMkLst>
+            <pc:docMk/>
+            <pc:sldMk cId="584521698" sldId="259"/>
+            <ac:spMk id="3" creationId="{CA87834F-FBCC-68E1-540B-B9A576E34975}"/>
+          </ac:spMkLst>
+        </pc:spChg>
+        <pc:spChg chg="add mod">
+          <ac:chgData name="poke 953" userId="c913613eb4ac0ae9" providerId="Windows Live" clId="Web-{750799B2-6321-41FD-873F-01700368E26C}" dt="2025-11-18T00:13:47.717" v="274" actId="1076"/>
+          <ac:spMkLst>
+            <pc:docMk/>
+            <pc:sldMk cId="584521698" sldId="259"/>
+            <ac:spMk id="4" creationId="{5DC2E94C-8511-6AAF-81FC-C37DAEBE0E19}"/>
+          </ac:spMkLst>
+        </pc:spChg>
+        <pc:spChg chg="add mod">
+          <ac:chgData name="poke 953" userId="c913613eb4ac0ae9" providerId="Windows Live" clId="Web-{750799B2-6321-41FD-873F-01700368E26C}" dt="2025-11-18T00:13:47.732" v="275" actId="1076"/>
+          <ac:spMkLst>
+            <pc:docMk/>
+            <pc:sldMk cId="584521698" sldId="259"/>
+            <ac:spMk id="5" creationId="{F064B1B7-8AFA-6762-17DD-D5B76FD6794D}"/>
+          </ac:spMkLst>
+        </pc:spChg>
+        <pc:spChg chg="add mod">
+          <ac:chgData name="poke 953" userId="c913613eb4ac0ae9" providerId="Windows Live" clId="Web-{750799B2-6321-41FD-873F-01700368E26C}" dt="2025-11-18T00:13:47.732" v="276" actId="1076"/>
+          <ac:spMkLst>
+            <pc:docMk/>
+            <pc:sldMk cId="584521698" sldId="259"/>
+            <ac:spMk id="6" creationId="{A1E9504A-CE51-B369-8640-A44E9231CE9D}"/>
+          </ac:spMkLst>
+        </pc:spChg>
+        <pc:spChg chg="add mod">
+          <ac:chgData name="poke 953" userId="c913613eb4ac0ae9" providerId="Windows Live" clId="Web-{750799B2-6321-41FD-873F-01700368E26C}" dt="2025-11-18T00:13:47.748" v="277" actId="1076"/>
+          <ac:spMkLst>
+            <pc:docMk/>
+            <pc:sldMk cId="584521698" sldId="259"/>
+            <ac:spMk id="7" creationId="{165CB523-A997-AC0A-A74A-350ACDB73A2F}"/>
+          </ac:spMkLst>
+        </pc:spChg>
+        <pc:spChg chg="add mod">
+          <ac:chgData name="poke 953" userId="c913613eb4ac0ae9" providerId="Windows Live" clId="Web-{750799B2-6321-41FD-873F-01700368E26C}" dt="2025-11-18T00:13:47.748" v="278" actId="1076"/>
+          <ac:spMkLst>
+            <pc:docMk/>
+            <pc:sldMk cId="584521698" sldId="259"/>
+            <ac:spMk id="8" creationId="{60C32BCE-541F-288E-AC71-5D31FB56FABB}"/>
+          </ac:spMkLst>
+        </pc:spChg>
+        <pc:spChg chg="add mod">
+          <ac:chgData name="poke 953" userId="c913613eb4ac0ae9" providerId="Windows Live" clId="Web-{750799B2-6321-41FD-873F-01700368E26C}" dt="2025-11-18T00:13:47.764" v="279" actId="1076"/>
+          <ac:spMkLst>
+            <pc:docMk/>
+            <pc:sldMk cId="584521698" sldId="259"/>
+            <ac:spMk id="9" creationId="{2BFFCAB5-DE67-9473-9566-D6A96E1D995A}"/>
+          </ac:spMkLst>
+        </pc:spChg>
+        <pc:spChg chg="add mod">
+          <ac:chgData name="poke 953" userId="c913613eb4ac0ae9" providerId="Windows Live" clId="Web-{750799B2-6321-41FD-873F-01700368E26C}" dt="2025-11-18T00:13:47.795" v="285" actId="1076"/>
+          <ac:spMkLst>
+            <pc:docMk/>
+            <pc:sldMk cId="584521698" sldId="259"/>
+            <ac:spMk id="16" creationId="{B0627B92-AFD2-E960-17C1-98F1A3B87450}"/>
+          </ac:spMkLst>
+        </pc:spChg>
+        <pc:spChg chg="add del mod">
+          <ac:chgData name="poke 953" userId="c913613eb4ac0ae9" providerId="Windows Live" clId="Web-{750799B2-6321-41FD-873F-01700368E26C}" dt="2025-11-18T00:13:35.919" v="273"/>
+          <ac:spMkLst>
+            <pc:docMk/>
+            <pc:sldMk cId="584521698" sldId="259"/>
+            <ac:spMk id="19" creationId="{1A23AC74-838A-B747-E430-1BA1709D00A2}"/>
+          </ac:spMkLst>
+        </pc:spChg>
+        <pc:cxnChg chg="add del">
+          <ac:chgData name="poke 953" userId="c913613eb4ac0ae9" providerId="Windows Live" clId="Web-{750799B2-6321-41FD-873F-01700368E26C}" dt="2025-11-18T00:05:56.672" v="156"/>
+          <ac:cxnSpMkLst>
+            <pc:docMk/>
+            <pc:sldMk cId="584521698" sldId="259"/>
+            <ac:cxnSpMk id="10" creationId="{FE34D541-2882-2B5E-A991-4BFC6E4CD61A}"/>
+          </ac:cxnSpMkLst>
+        </pc:cxnChg>
+        <pc:cxnChg chg="add mod">
+          <ac:chgData name="poke 953" userId="c913613eb4ac0ae9" providerId="Windows Live" clId="Web-{750799B2-6321-41FD-873F-01700368E26C}" dt="2025-11-18T00:13:47.764" v="280" actId="1076"/>
+          <ac:cxnSpMkLst>
+            <pc:docMk/>
+            <pc:sldMk cId="584521698" sldId="259"/>
+            <ac:cxnSpMk id="11" creationId="{E072F568-955B-B7B2-A1F9-BF1515245194}"/>
+          </ac:cxnSpMkLst>
+        </pc:cxnChg>
+        <pc:cxnChg chg="add mod">
+          <ac:chgData name="poke 953" userId="c913613eb4ac0ae9" providerId="Windows Live" clId="Web-{750799B2-6321-41FD-873F-01700368E26C}" dt="2025-11-18T00:13:47.764" v="281" actId="1076"/>
+          <ac:cxnSpMkLst>
+            <pc:docMk/>
+            <pc:sldMk cId="584521698" sldId="259"/>
+            <ac:cxnSpMk id="12" creationId="{88FFA6AB-47C3-1A49-83CB-F8FED3EB3264}"/>
+          </ac:cxnSpMkLst>
+        </pc:cxnChg>
+        <pc:cxnChg chg="add mod">
+          <ac:chgData name="poke 953" userId="c913613eb4ac0ae9" providerId="Windows Live" clId="Web-{750799B2-6321-41FD-873F-01700368E26C}" dt="2025-11-18T00:13:47.779" v="282" actId="1076"/>
+          <ac:cxnSpMkLst>
+            <pc:docMk/>
+            <pc:sldMk cId="584521698" sldId="259"/>
+            <ac:cxnSpMk id="13" creationId="{F357EF74-AAE6-4DBB-C2C5-B2C664C5C047}"/>
+          </ac:cxnSpMkLst>
+        </pc:cxnChg>
+        <pc:cxnChg chg="add mod">
+          <ac:chgData name="poke 953" userId="c913613eb4ac0ae9" providerId="Windows Live" clId="Web-{750799B2-6321-41FD-873F-01700368E26C}" dt="2025-11-18T00:13:47.779" v="283" actId="1076"/>
+          <ac:cxnSpMkLst>
+            <pc:docMk/>
+            <pc:sldMk cId="584521698" sldId="259"/>
+            <ac:cxnSpMk id="14" creationId="{2EADF498-4AAF-C653-9FB6-5FF00BE6D94D}"/>
+          </ac:cxnSpMkLst>
+        </pc:cxnChg>
+        <pc:cxnChg chg="add mod">
+          <ac:chgData name="poke 953" userId="c913613eb4ac0ae9" providerId="Windows Live" clId="Web-{750799B2-6321-41FD-873F-01700368E26C}" dt="2025-11-18T00:13:47.779" v="284" actId="1076"/>
+          <ac:cxnSpMkLst>
+            <pc:docMk/>
+            <pc:sldMk cId="584521698" sldId="259"/>
+            <ac:cxnSpMk id="15" creationId="{B543BFAD-6201-383A-58F2-00F2715A9DD7}"/>
+          </ac:cxnSpMkLst>
+        </pc:cxnChg>
+        <pc:cxnChg chg="add mod">
+          <ac:chgData name="poke 953" userId="c913613eb4ac0ae9" providerId="Windows Live" clId="Web-{750799B2-6321-41FD-873F-01700368E26C}" dt="2025-11-18T00:13:47.795" v="286" actId="1076"/>
+          <ac:cxnSpMkLst>
+            <pc:docMk/>
+            <pc:sldMk cId="584521698" sldId="259"/>
+            <ac:cxnSpMk id="17" creationId="{414247FA-FC08-C026-2B63-40409D1EF679}"/>
+          </ac:cxnSpMkLst>
+        </pc:cxnChg>
+      </pc:sldChg>
+      <pc:sldChg chg="addSp delSp modSp new">
+        <pc:chgData name="poke 953" userId="c913613eb4ac0ae9" providerId="Windows Live" clId="Web-{750799B2-6321-41FD-873F-01700368E26C}" dt="2025-11-18T00:11:40.252" v="255" actId="20577"/>
+        <pc:sldMkLst>
+          <pc:docMk/>
+          <pc:sldMk cId="1676052078" sldId="260"/>
+        </pc:sldMkLst>
+        <pc:spChg chg="mod">
+          <ac:chgData name="poke 953" userId="c913613eb4ac0ae9" providerId="Windows Live" clId="Web-{750799B2-6321-41FD-873F-01700368E26C}" dt="2025-11-18T00:11:40.252" v="255" actId="20577"/>
+          <ac:spMkLst>
+            <pc:docMk/>
+            <pc:sldMk cId="1676052078" sldId="260"/>
+            <ac:spMk id="2" creationId="{AD0CF682-A829-1CE0-BEEC-E4407D9971FB}"/>
+          </ac:spMkLst>
+        </pc:spChg>
+        <pc:spChg chg="del mod">
+          <ac:chgData name="poke 953" userId="c913613eb4ac0ae9" providerId="Windows Live" clId="Web-{750799B2-6321-41FD-873F-01700368E26C}" dt="2025-11-18T00:10:45.827" v="227"/>
+          <ac:spMkLst>
+            <pc:docMk/>
+            <pc:sldMk cId="1676052078" sldId="260"/>
+            <ac:spMk id="3" creationId="{DCDCF09D-D15A-5263-7894-514F13C5C247}"/>
+          </ac:spMkLst>
+        </pc:spChg>
+        <pc:spChg chg="add mod">
+          <ac:chgData name="poke 953" userId="c913613eb4ac0ae9" providerId="Windows Live" clId="Web-{750799B2-6321-41FD-873F-01700368E26C}" dt="2025-11-18T00:10:53.468" v="229" actId="20577"/>
+          <ac:spMkLst>
+            <pc:docMk/>
+            <pc:sldMk cId="1676052078" sldId="260"/>
+            <ac:spMk id="4" creationId="{CA87834F-FBCC-68E1-540B-B9A576E34975}"/>
+          </ac:spMkLst>
+        </pc:spChg>
       </pc:sldChg>
     </pc:docChg>
   </pc:docChgLst>
@@ -292,709 +975,26 @@
     </pc:docChg>
   </pc:docChgLst>
   <pc:docChgLst>
-    <pc:chgData name="poke 953" userId="c913613eb4ac0ae9" providerId="Windows Live" clId="Web-{91ED1F58-71F7-4F28-826F-FBE41EECC278}"/>
-    <pc:docChg chg="addSld modSld addMainMaster delMainMaster">
-      <pc:chgData name="poke 953" userId="c913613eb4ac0ae9" providerId="Windows Live" clId="Web-{91ED1F58-71F7-4F28-826F-FBE41EECC278}" dt="2025-11-16T12:35:43.169" v="63" actId="20577"/>
+    <pc:chgData name="poke 953" userId="c913613eb4ac0ae9" providerId="Windows Live" clId="Web-{120B2B6B-CC6C-494C-8ABA-7C2200B463BC}"/>
+    <pc:docChg chg="modSld">
+      <pc:chgData name="poke 953" userId="c913613eb4ac0ae9" providerId="Windows Live" clId="Web-{120B2B6B-CC6C-494C-8ABA-7C2200B463BC}" dt="2025-11-16T18:10:13.376" v="3"/>
       <pc:docMkLst>
         <pc:docMk/>
       </pc:docMkLst>
-      <pc:sldChg chg="addSp delSp modSp mod setBg modClrScheme chgLayout">
-        <pc:chgData name="poke 953" userId="c913613eb4ac0ae9" providerId="Windows Live" clId="Web-{91ED1F58-71F7-4F28-826F-FBE41EECC278}" dt="2025-11-16T12:29:46.192" v="46"/>
+      <pc:sldChg chg="addSp delSp modSp">
+        <pc:chgData name="poke 953" userId="c913613eb4ac0ae9" providerId="Windows Live" clId="Web-{120B2B6B-CC6C-494C-8ABA-7C2200B463BC}" dt="2025-11-16T18:10:13.376" v="3"/>
         <pc:sldMkLst>
           <pc:docMk/>
           <pc:sldMk cId="3784089036" sldId="256"/>
         </pc:sldMkLst>
-        <pc:spChg chg="mod">
-          <ac:chgData name="poke 953" userId="c913613eb4ac0ae9" providerId="Windows Live" clId="Web-{91ED1F58-71F7-4F28-826F-FBE41EECC278}" dt="2025-11-16T12:29:46.192" v="46"/>
-          <ac:spMkLst>
-            <pc:docMk/>
-            <pc:sldMk cId="3784089036" sldId="256"/>
-            <ac:spMk id="2" creationId="{00000000-0000-0000-0000-000000000000}"/>
-          </ac:spMkLst>
-        </pc:spChg>
-        <pc:spChg chg="mod">
-          <ac:chgData name="poke 953" userId="c913613eb4ac0ae9" providerId="Windows Live" clId="Web-{91ED1F58-71F7-4F28-826F-FBE41EECC278}" dt="2025-11-16T12:29:46.192" v="46"/>
-          <ac:spMkLst>
-            <pc:docMk/>
-            <pc:sldMk cId="3784089036" sldId="256"/>
-            <ac:spMk id="3" creationId="{00000000-0000-0000-0000-000000000000}"/>
-          </ac:spMkLst>
-        </pc:spChg>
-        <pc:spChg chg="add">
-          <ac:chgData name="poke 953" userId="c913613eb4ac0ae9" providerId="Windows Live" clId="Web-{91ED1F58-71F7-4F28-826F-FBE41EECC278}" dt="2025-11-16T12:29:46.192" v="46"/>
-          <ac:spMkLst>
-            <pc:docMk/>
-            <pc:sldMk cId="3784089036" sldId="256"/>
-            <ac:spMk id="26" creationId="{5AB5C7EE-A919-646B-4F86-BACCBC52D961}"/>
-          </ac:spMkLst>
-        </pc:spChg>
-        <pc:picChg chg="add mod">
-          <ac:chgData name="poke 953" userId="c913613eb4ac0ae9" providerId="Windows Live" clId="Web-{91ED1F58-71F7-4F28-826F-FBE41EECC278}" dt="2025-11-16T12:29:46.192" v="46"/>
+        <pc:picChg chg="add del">
+          <ac:chgData name="poke 953" userId="c913613eb4ac0ae9" providerId="Windows Live" clId="Web-{120B2B6B-CC6C-494C-8ABA-7C2200B463BC}" dt="2025-11-16T18:10:13.376" v="3"/>
           <ac:picMkLst>
             <pc:docMk/>
             <pc:sldMk cId="3784089036" sldId="256"/>
             <ac:picMk id="7" creationId="{817B14CB-F517-2354-C706-4F1E24537EEE}"/>
           </ac:picMkLst>
         </pc:picChg>
-      </pc:sldChg>
-      <pc:sldChg chg="modSp new">
-        <pc:chgData name="poke 953" userId="c913613eb4ac0ae9" providerId="Windows Live" clId="Web-{91ED1F58-71F7-4F28-826F-FBE41EECC278}" dt="2025-11-16T12:35:43.169" v="63" actId="20577"/>
-        <pc:sldMkLst>
-          <pc:docMk/>
-          <pc:sldMk cId="2033124443" sldId="257"/>
-        </pc:sldMkLst>
-        <pc:spChg chg="mod">
-          <ac:chgData name="poke 953" userId="c913613eb4ac0ae9" providerId="Windows Live" clId="Web-{91ED1F58-71F7-4F28-826F-FBE41EECC278}" dt="2025-11-16T12:31:10.551" v="54" actId="20577"/>
-          <ac:spMkLst>
-            <pc:docMk/>
-            <pc:sldMk cId="2033124443" sldId="257"/>
-            <ac:spMk id="2" creationId="{740ACF3C-B2D9-532F-C66D-85A75663C67A}"/>
-          </ac:spMkLst>
-        </pc:spChg>
-        <pc:spChg chg="mod">
-          <ac:chgData name="poke 953" userId="c913613eb4ac0ae9" providerId="Windows Live" clId="Web-{91ED1F58-71F7-4F28-826F-FBE41EECC278}" dt="2025-11-16T12:35:43.169" v="63" actId="20577"/>
-          <ac:spMkLst>
-            <pc:docMk/>
-            <pc:sldMk cId="2033124443" sldId="257"/>
-            <ac:spMk id="3" creationId="{945BE91C-4C09-6560-3210-225079A56955}"/>
-          </ac:spMkLst>
-        </pc:spChg>
-      </pc:sldChg>
-      <pc:sldMasterChg chg="add replId addSldLayout">
-        <pc:chgData name="poke 953" userId="c913613eb4ac0ae9" providerId="Windows Live" clId="Web-{91ED1F58-71F7-4F28-826F-FBE41EECC278}" dt="2025-11-16T12:18:55.781" v="35"/>
-        <pc:sldMasterMkLst>
-          <pc:docMk/>
-          <pc:sldMasterMk cId="1920457781" sldId="2147483660"/>
-        </pc:sldMasterMkLst>
-        <pc:sldLayoutChg chg="add">
-          <pc:chgData name="poke 953" userId="c913613eb4ac0ae9" providerId="Windows Live" clId="Web-{91ED1F58-71F7-4F28-826F-FBE41EECC278}" dt="2025-11-16T12:18:55.781" v="35"/>
-          <pc:sldLayoutMkLst>
-            <pc:docMk/>
-            <pc:sldMasterMk cId="1920457781" sldId="2147483660"/>
-            <pc:sldLayoutMk cId="2105446793" sldId="2147483661"/>
-          </pc:sldLayoutMkLst>
-        </pc:sldLayoutChg>
-        <pc:sldLayoutChg chg="add replId">
-          <pc:chgData name="poke 953" userId="c913613eb4ac0ae9" providerId="Windows Live" clId="Web-{91ED1F58-71F7-4F28-826F-FBE41EECC278}" dt="2025-11-16T12:18:55.781" v="35"/>
-          <pc:sldLayoutMkLst>
-            <pc:docMk/>
-            <pc:sldMasterMk cId="1920457781" sldId="2147483660"/>
-            <pc:sldLayoutMk cId="3530714011" sldId="2147483662"/>
-          </pc:sldLayoutMkLst>
-        </pc:sldLayoutChg>
-        <pc:sldLayoutChg chg="add replId">
-          <pc:chgData name="poke 953" userId="c913613eb4ac0ae9" providerId="Windows Live" clId="Web-{91ED1F58-71F7-4F28-826F-FBE41EECC278}" dt="2025-11-16T12:18:55.781" v="35"/>
-          <pc:sldLayoutMkLst>
-            <pc:docMk/>
-            <pc:sldMasterMk cId="1920457781" sldId="2147483660"/>
-            <pc:sldLayoutMk cId="3555182978" sldId="2147483663"/>
-          </pc:sldLayoutMkLst>
-        </pc:sldLayoutChg>
-        <pc:sldLayoutChg chg="add replId">
-          <pc:chgData name="poke 953" userId="c913613eb4ac0ae9" providerId="Windows Live" clId="Web-{91ED1F58-71F7-4F28-826F-FBE41EECC278}" dt="2025-11-16T12:18:55.781" v="35"/>
-          <pc:sldLayoutMkLst>
-            <pc:docMk/>
-            <pc:sldMasterMk cId="1920457781" sldId="2147483660"/>
-            <pc:sldLayoutMk cId="331114366" sldId="2147483664"/>
-          </pc:sldLayoutMkLst>
-        </pc:sldLayoutChg>
-        <pc:sldLayoutChg chg="add replId">
-          <pc:chgData name="poke 953" userId="c913613eb4ac0ae9" providerId="Windows Live" clId="Web-{91ED1F58-71F7-4F28-826F-FBE41EECC278}" dt="2025-11-16T12:18:55.781" v="35"/>
-          <pc:sldLayoutMkLst>
-            <pc:docMk/>
-            <pc:sldMasterMk cId="1920457781" sldId="2147483660"/>
-            <pc:sldLayoutMk cId="1512560825" sldId="2147483665"/>
-          </pc:sldLayoutMkLst>
-        </pc:sldLayoutChg>
-        <pc:sldLayoutChg chg="add replId">
-          <pc:chgData name="poke 953" userId="c913613eb4ac0ae9" providerId="Windows Live" clId="Web-{91ED1F58-71F7-4F28-826F-FBE41EECC278}" dt="2025-11-16T12:18:55.781" v="35"/>
-          <pc:sldLayoutMkLst>
-            <pc:docMk/>
-            <pc:sldMasterMk cId="1920457781" sldId="2147483660"/>
-            <pc:sldLayoutMk cId="3239021891" sldId="2147483666"/>
-          </pc:sldLayoutMkLst>
-        </pc:sldLayoutChg>
-        <pc:sldLayoutChg chg="add replId">
-          <pc:chgData name="poke 953" userId="c913613eb4ac0ae9" providerId="Windows Live" clId="Web-{91ED1F58-71F7-4F28-826F-FBE41EECC278}" dt="2025-11-16T12:18:55.781" v="35"/>
-          <pc:sldLayoutMkLst>
-            <pc:docMk/>
-            <pc:sldMasterMk cId="1920457781" sldId="2147483660"/>
-            <pc:sldLayoutMk cId="1919877203" sldId="2147483667"/>
-          </pc:sldLayoutMkLst>
-        </pc:sldLayoutChg>
-        <pc:sldLayoutChg chg="add replId">
-          <pc:chgData name="poke 953" userId="c913613eb4ac0ae9" providerId="Windows Live" clId="Web-{91ED1F58-71F7-4F28-826F-FBE41EECC278}" dt="2025-11-16T12:18:55.781" v="35"/>
-          <pc:sldLayoutMkLst>
-            <pc:docMk/>
-            <pc:sldMasterMk cId="1920457781" sldId="2147483660"/>
-            <pc:sldLayoutMk cId="590519224" sldId="2147483668"/>
-          </pc:sldLayoutMkLst>
-        </pc:sldLayoutChg>
-        <pc:sldLayoutChg chg="add replId">
-          <pc:chgData name="poke 953" userId="c913613eb4ac0ae9" providerId="Windows Live" clId="Web-{91ED1F58-71F7-4F28-826F-FBE41EECC278}" dt="2025-11-16T12:18:55.781" v="35"/>
-          <pc:sldLayoutMkLst>
-            <pc:docMk/>
-            <pc:sldMasterMk cId="1920457781" sldId="2147483660"/>
-            <pc:sldLayoutMk cId="3081640658" sldId="2147483669"/>
-          </pc:sldLayoutMkLst>
-        </pc:sldLayoutChg>
-        <pc:sldLayoutChg chg="add replId">
-          <pc:chgData name="poke 953" userId="c913613eb4ac0ae9" providerId="Windows Live" clId="Web-{91ED1F58-71F7-4F28-826F-FBE41EECC278}" dt="2025-11-16T12:18:55.781" v="35"/>
-          <pc:sldLayoutMkLst>
-            <pc:docMk/>
-            <pc:sldMasterMk cId="1920457781" sldId="2147483660"/>
-            <pc:sldLayoutMk cId="1897910840" sldId="2147483670"/>
-          </pc:sldLayoutMkLst>
-        </pc:sldLayoutChg>
-        <pc:sldLayoutChg chg="add replId">
-          <pc:chgData name="poke 953" userId="c913613eb4ac0ae9" providerId="Windows Live" clId="Web-{91ED1F58-71F7-4F28-826F-FBE41EECC278}" dt="2025-11-16T12:18:55.781" v="35"/>
-          <pc:sldLayoutMkLst>
-            <pc:docMk/>
-            <pc:sldMasterMk cId="1920457781" sldId="2147483660"/>
-            <pc:sldLayoutMk cId="240778695" sldId="2147483671"/>
-          </pc:sldLayoutMkLst>
-        </pc:sldLayoutChg>
-      </pc:sldMasterChg>
-    </pc:docChg>
-  </pc:docChgLst>
-  <pc:docChgLst>
-    <pc:chgData name="poke 953" userId="c913613eb4ac0ae9" providerId="Windows Live" clId="Web-{8ED3E464-459F-4EE1-BF0D-0F3D4528D82B}"/>
-    <pc:docChg chg="modSld">
-      <pc:chgData name="poke 953" userId="c913613eb4ac0ae9" providerId="Windows Live" clId="Web-{8ED3E464-459F-4EE1-BF0D-0F3D4528D82B}" dt="2025-11-19T13:42:47.211" v="55" actId="20577"/>
-      <pc:docMkLst>
-        <pc:docMk/>
-      </pc:docMkLst>
-      <pc:sldChg chg="modSp">
-        <pc:chgData name="poke 953" userId="c913613eb4ac0ae9" providerId="Windows Live" clId="Web-{8ED3E464-459F-4EE1-BF0D-0F3D4528D82B}" dt="2025-11-19T13:42:47.211" v="55" actId="20577"/>
-        <pc:sldMkLst>
-          <pc:docMk/>
-          <pc:sldMk cId="2033124443" sldId="257"/>
-        </pc:sldMkLst>
-        <pc:spChg chg="mod">
-          <ac:chgData name="poke 953" userId="c913613eb4ac0ae9" providerId="Windows Live" clId="Web-{8ED3E464-459F-4EE1-BF0D-0F3D4528D82B}" dt="2025-11-19T13:42:47.211" v="55" actId="20577"/>
-          <ac:spMkLst>
-            <pc:docMk/>
-            <pc:sldMk cId="2033124443" sldId="257"/>
-            <ac:spMk id="3" creationId="{945BE91C-4C09-6560-3210-225079A56955}"/>
-          </ac:spMkLst>
-        </pc:spChg>
-      </pc:sldChg>
-      <pc:sldChg chg="modSp">
-        <pc:chgData name="poke 953" userId="c913613eb4ac0ae9" providerId="Windows Live" clId="Web-{8ED3E464-459F-4EE1-BF0D-0F3D4528D82B}" dt="2025-11-19T07:55:39.203" v="5" actId="20577"/>
-        <pc:sldMkLst>
-          <pc:docMk/>
-          <pc:sldMk cId="1676052078" sldId="260"/>
-        </pc:sldMkLst>
-        <pc:spChg chg="mod">
-          <ac:chgData name="poke 953" userId="c913613eb4ac0ae9" providerId="Windows Live" clId="Web-{8ED3E464-459F-4EE1-BF0D-0F3D4528D82B}" dt="2025-11-19T07:55:39.203" v="5" actId="20577"/>
-          <ac:spMkLst>
-            <pc:docMk/>
-            <pc:sldMk cId="1676052078" sldId="260"/>
-            <ac:spMk id="4" creationId="{CA87834F-FBCC-68E1-540B-B9A576E34975}"/>
-          </ac:spMkLst>
-        </pc:spChg>
-      </pc:sldChg>
-      <pc:sldChg chg="modSp">
-        <pc:chgData name="poke 953" userId="c913613eb4ac0ae9" providerId="Windows Live" clId="Web-{8ED3E464-459F-4EE1-BF0D-0F3D4528D82B}" dt="2025-11-19T08:05:19.398" v="7" actId="20577"/>
-        <pc:sldMkLst>
-          <pc:docMk/>
-          <pc:sldMk cId="3556524927" sldId="261"/>
-        </pc:sldMkLst>
-        <pc:spChg chg="mod">
-          <ac:chgData name="poke 953" userId="c913613eb4ac0ae9" providerId="Windows Live" clId="Web-{8ED3E464-459F-4EE1-BF0D-0F3D4528D82B}" dt="2025-11-19T08:05:19.398" v="7" actId="20577"/>
-          <ac:spMkLst>
-            <pc:docMk/>
-            <pc:sldMk cId="3556524927" sldId="261"/>
-            <ac:spMk id="3" creationId="{D654BA91-BAEA-6714-9F84-0F10234AA0BD}"/>
-          </ac:spMkLst>
-        </pc:spChg>
-      </pc:sldChg>
-    </pc:docChg>
-  </pc:docChgLst>
-  <pc:docChgLst>
-    <pc:chgData name="poke 953" userId="c913613eb4ac0ae9" providerId="Windows Live" clId="Web-{5D32DB45-B68A-408A-913F-78C085A6EE4A}"/>
-    <pc:docChg chg="addSld modSld">
-      <pc:chgData name="poke 953" userId="c913613eb4ac0ae9" providerId="Windows Live" clId="Web-{5D32DB45-B68A-408A-913F-78C085A6EE4A}" dt="2025-11-18T14:07:58.322" v="456" actId="20577"/>
-      <pc:docMkLst>
-        <pc:docMk/>
-      </pc:docMkLst>
-      <pc:sldChg chg="addSp modSp">
-        <pc:chgData name="poke 953" userId="c913613eb4ac0ae9" providerId="Windows Live" clId="Web-{5D32DB45-B68A-408A-913F-78C085A6EE4A}" dt="2025-11-18T13:08:33.912" v="96" actId="20577"/>
-        <pc:sldMkLst>
-          <pc:docMk/>
-          <pc:sldMk cId="621877034" sldId="258"/>
-        </pc:sldMkLst>
-        <pc:spChg chg="add mod">
-          <ac:chgData name="poke 953" userId="c913613eb4ac0ae9" providerId="Windows Live" clId="Web-{5D32DB45-B68A-408A-913F-78C085A6EE4A}" dt="2025-11-18T13:08:33.912" v="96" actId="20577"/>
-          <ac:spMkLst>
-            <pc:docMk/>
-            <pc:sldMk cId="621877034" sldId="258"/>
-            <ac:spMk id="3" creationId="{0064D4A9-5531-B352-83F9-EED5E31A5A44}"/>
-          </ac:spMkLst>
-        </pc:spChg>
-      </pc:sldChg>
-      <pc:sldChg chg="addSp delSp modSp">
-        <pc:chgData name="poke 953" userId="c913613eb4ac0ae9" providerId="Windows Live" clId="Web-{5D32DB45-B68A-408A-913F-78C085A6EE4A}" dt="2025-11-18T13:11:17.398" v="158" actId="20577"/>
-        <pc:sldMkLst>
-          <pc:docMk/>
-          <pc:sldMk cId="1676052078" sldId="260"/>
-        </pc:sldMkLst>
-        <pc:spChg chg="add del">
-          <ac:chgData name="poke 953" userId="c913613eb4ac0ae9" providerId="Windows Live" clId="Web-{5D32DB45-B68A-408A-913F-78C085A6EE4A}" dt="2025-11-18T13:09:16.443" v="98"/>
-          <ac:spMkLst>
-            <pc:docMk/>
-            <pc:sldMk cId="1676052078" sldId="260"/>
-            <ac:spMk id="3" creationId="{636F8841-5F1C-16B1-81B6-2AD020EB730C}"/>
-          </ac:spMkLst>
-        </pc:spChg>
-        <pc:spChg chg="mod">
-          <ac:chgData name="poke 953" userId="c913613eb4ac0ae9" providerId="Windows Live" clId="Web-{5D32DB45-B68A-408A-913F-78C085A6EE4A}" dt="2025-11-18T13:11:17.398" v="158" actId="20577"/>
-          <ac:spMkLst>
-            <pc:docMk/>
-            <pc:sldMk cId="1676052078" sldId="260"/>
-            <ac:spMk id="4" creationId="{CA87834F-FBCC-68E1-540B-B9A576E34975}"/>
-          </ac:spMkLst>
-        </pc:spChg>
-      </pc:sldChg>
-      <pc:sldChg chg="modSp new">
-        <pc:chgData name="poke 953" userId="c913613eb4ac0ae9" providerId="Windows Live" clId="Web-{5D32DB45-B68A-408A-913F-78C085A6EE4A}" dt="2025-11-18T14:06:06.176" v="388" actId="20577"/>
-        <pc:sldMkLst>
-          <pc:docMk/>
-          <pc:sldMk cId="3556524927" sldId="261"/>
-        </pc:sldMkLst>
-        <pc:spChg chg="mod">
-          <ac:chgData name="poke 953" userId="c913613eb4ac0ae9" providerId="Windows Live" clId="Web-{5D32DB45-B68A-408A-913F-78C085A6EE4A}" dt="2025-11-18T13:11:48.852" v="182" actId="20577"/>
-          <ac:spMkLst>
-            <pc:docMk/>
-            <pc:sldMk cId="3556524927" sldId="261"/>
-            <ac:spMk id="2" creationId="{5D39E20B-EE24-1DBB-C4FB-ABE45F7FCF8E}"/>
-          </ac:spMkLst>
-        </pc:spChg>
-        <pc:spChg chg="mod">
-          <ac:chgData name="poke 953" userId="c913613eb4ac0ae9" providerId="Windows Live" clId="Web-{5D32DB45-B68A-408A-913F-78C085A6EE4A}" dt="2025-11-18T14:06:06.176" v="388" actId="20577"/>
-          <ac:spMkLst>
-            <pc:docMk/>
-            <pc:sldMk cId="3556524927" sldId="261"/>
-            <ac:spMk id="3" creationId="{D654BA91-BAEA-6714-9F84-0F10234AA0BD}"/>
-          </ac:spMkLst>
-        </pc:spChg>
-      </pc:sldChg>
-      <pc:sldChg chg="modSp new">
-        <pc:chgData name="poke 953" userId="c913613eb4ac0ae9" providerId="Windows Live" clId="Web-{5D32DB45-B68A-408A-913F-78C085A6EE4A}" dt="2025-11-18T14:07:58.322" v="456" actId="20577"/>
-        <pc:sldMkLst>
-          <pc:docMk/>
-          <pc:sldMk cId="1281333838" sldId="262"/>
-        </pc:sldMkLst>
-        <pc:spChg chg="mod">
-          <ac:chgData name="poke 953" userId="c913613eb4ac0ae9" providerId="Windows Live" clId="Web-{5D32DB45-B68A-408A-913F-78C085A6EE4A}" dt="2025-11-18T14:06:17.989" v="398" actId="20577"/>
-          <ac:spMkLst>
-            <pc:docMk/>
-            <pc:sldMk cId="1281333838" sldId="262"/>
-            <ac:spMk id="2" creationId="{FBDF1928-F70F-82E4-A0B0-FFDBE6E08E62}"/>
-          </ac:spMkLst>
-        </pc:spChg>
-        <pc:spChg chg="mod">
-          <ac:chgData name="poke 953" userId="c913613eb4ac0ae9" providerId="Windows Live" clId="Web-{5D32DB45-B68A-408A-913F-78C085A6EE4A}" dt="2025-11-18T14:07:58.322" v="456" actId="20577"/>
-          <ac:spMkLst>
-            <pc:docMk/>
-            <pc:sldMk cId="1281333838" sldId="262"/>
-            <ac:spMk id="3" creationId="{1B058352-71E4-4527-41C2-97A922754AB3}"/>
-          </ac:spMkLst>
-        </pc:spChg>
-      </pc:sldChg>
-    </pc:docChg>
-  </pc:docChgLst>
-  <pc:docChgLst>
-    <pc:chgData name="poke 953" userId="c913613eb4ac0ae9" providerId="LiveId" clId="{99A484BB-246A-43CA-AFF2-5AFF2003EEDE}"/>
-    <pc:docChg chg="undo custSel delSld modSld">
-      <pc:chgData name="poke 953" userId="c913613eb4ac0ae9" providerId="LiveId" clId="{99A484BB-246A-43CA-AFF2-5AFF2003EEDE}" dt="2026-04-26T11:17:59.441" v="54" actId="47"/>
-      <pc:docMkLst>
-        <pc:docMk/>
-      </pc:docMkLst>
-      <pc:sldChg chg="addSp delSp modSp mod">
-        <pc:chgData name="poke 953" userId="c913613eb4ac0ae9" providerId="LiveId" clId="{99A484BB-246A-43CA-AFF2-5AFF2003EEDE}" dt="2026-04-26T11:17:05.784" v="44" actId="115"/>
-        <pc:sldMkLst>
-          <pc:docMk/>
-          <pc:sldMk cId="584521698" sldId="259"/>
-        </pc:sldMkLst>
-        <pc:spChg chg="add mod">
-          <ac:chgData name="poke 953" userId="c913613eb4ac0ae9" providerId="LiveId" clId="{99A484BB-246A-43CA-AFF2-5AFF2003EEDE}" dt="2026-04-26T11:17:05.784" v="44" actId="115"/>
-          <ac:spMkLst>
-            <pc:docMk/>
-            <pc:sldMk cId="584521698" sldId="259"/>
-            <ac:spMk id="2" creationId="{DD095861-E5D7-96FB-BD81-532D0CFD3981}"/>
-          </ac:spMkLst>
-        </pc:spChg>
-        <pc:spChg chg="add">
-          <ac:chgData name="poke 953" userId="c913613eb4ac0ae9" providerId="LiveId" clId="{99A484BB-246A-43CA-AFF2-5AFF2003EEDE}" dt="2026-04-26T11:16:57.804" v="40" actId="11529"/>
-          <ac:spMkLst>
-            <pc:docMk/>
-            <pc:sldMk cId="584521698" sldId="259"/>
-            <ac:spMk id="3" creationId="{D028D9CC-D96B-C117-133B-D07CE764D544}"/>
-          </ac:spMkLst>
-        </pc:spChg>
-        <pc:spChg chg="mod">
-          <ac:chgData name="poke 953" userId="c913613eb4ac0ae9" providerId="LiveId" clId="{99A484BB-246A-43CA-AFF2-5AFF2003EEDE}" dt="2026-04-26T11:16:04.924" v="28" actId="13822"/>
-          <ac:spMkLst>
-            <pc:docMk/>
-            <pc:sldMk cId="584521698" sldId="259"/>
-            <ac:spMk id="19" creationId="{F08CE3D1-06CB-E4CC-9949-427DC8B5B99D}"/>
-          </ac:spMkLst>
-        </pc:spChg>
-        <pc:spChg chg="mod">
-          <ac:chgData name="poke 953" userId="c913613eb4ac0ae9" providerId="LiveId" clId="{99A484BB-246A-43CA-AFF2-5AFF2003EEDE}" dt="2026-04-26T11:16:11.574" v="30" actId="13822"/>
-          <ac:spMkLst>
-            <pc:docMk/>
-            <pc:sldMk cId="584521698" sldId="259"/>
-            <ac:spMk id="20" creationId="{05504AAE-F4A5-8EF9-061A-310B48D74CF4}"/>
-          </ac:spMkLst>
-        </pc:spChg>
-        <pc:spChg chg="mod">
-          <ac:chgData name="poke 953" userId="c913613eb4ac0ae9" providerId="LiveId" clId="{99A484BB-246A-43CA-AFF2-5AFF2003EEDE}" dt="2026-04-26T11:16:02.734" v="27" actId="13822"/>
-          <ac:spMkLst>
-            <pc:docMk/>
-            <pc:sldMk cId="584521698" sldId="259"/>
-            <ac:spMk id="21" creationId="{07A60E84-9785-6DB5-4B60-89492BE2BEB1}"/>
-          </ac:spMkLst>
-        </pc:spChg>
-        <pc:spChg chg="mod">
-          <ac:chgData name="poke 953" userId="c913613eb4ac0ae9" providerId="LiveId" clId="{99A484BB-246A-43CA-AFF2-5AFF2003EEDE}" dt="2026-04-26T11:16:13.173" v="32" actId="13822"/>
-          <ac:spMkLst>
-            <pc:docMk/>
-            <pc:sldMk cId="584521698" sldId="259"/>
-            <ac:spMk id="22" creationId="{F0F98BCC-1204-FBA5-35C1-FFC2B1A33165}"/>
-          </ac:spMkLst>
-        </pc:spChg>
-        <pc:spChg chg="mod">
-          <ac:chgData name="poke 953" userId="c913613eb4ac0ae9" providerId="LiveId" clId="{99A484BB-246A-43CA-AFF2-5AFF2003EEDE}" dt="2026-04-26T11:16:14.794" v="33" actId="13822"/>
-          <ac:spMkLst>
-            <pc:docMk/>
-            <pc:sldMk cId="584521698" sldId="259"/>
-            <ac:spMk id="23" creationId="{75F96745-7FEF-FD4B-D974-815AC385C719}"/>
-          </ac:spMkLst>
-        </pc:spChg>
-        <pc:spChg chg="mod">
-          <ac:chgData name="poke 953" userId="c913613eb4ac0ae9" providerId="LiveId" clId="{99A484BB-246A-43CA-AFF2-5AFF2003EEDE}" dt="2026-04-26T11:16:16.064" v="34" actId="13822"/>
-          <ac:spMkLst>
-            <pc:docMk/>
-            <pc:sldMk cId="584521698" sldId="259"/>
-            <ac:spMk id="24" creationId="{EE7DCDB7-047F-0CE6-BF01-98DD7B29C22A}"/>
-          </ac:spMkLst>
-        </pc:spChg>
-        <pc:spChg chg="del mod">
-          <ac:chgData name="poke 953" userId="c913613eb4ac0ae9" providerId="LiveId" clId="{99A484BB-246A-43CA-AFF2-5AFF2003EEDE}" dt="2026-04-26T11:15:44.385" v="24"/>
-          <ac:spMkLst>
-            <pc:docMk/>
-            <pc:sldMk cId="584521698" sldId="259"/>
-            <ac:spMk id="34" creationId="{C4C1A6B8-54BC-4FE0-073A-70232EFC168D}"/>
-          </ac:spMkLst>
-        </pc:spChg>
-      </pc:sldChg>
-      <pc:sldChg chg="addSp modSp mod modNotesTx">
-        <pc:chgData name="poke 953" userId="c913613eb4ac0ae9" providerId="LiveId" clId="{99A484BB-246A-43CA-AFF2-5AFF2003EEDE}" dt="2026-04-26T11:17:50.381" v="52"/>
-        <pc:sldMkLst>
-          <pc:docMk/>
-          <pc:sldMk cId="3556524927" sldId="261"/>
-        </pc:sldMkLst>
-        <pc:spChg chg="mod">
-          <ac:chgData name="poke 953" userId="c913613eb4ac0ae9" providerId="LiveId" clId="{99A484BB-246A-43CA-AFF2-5AFF2003EEDE}" dt="2026-04-26T11:17:12.770" v="45" actId="20577"/>
-          <ac:spMkLst>
-            <pc:docMk/>
-            <pc:sldMk cId="3556524927" sldId="261"/>
-            <ac:spMk id="3" creationId="{D654BA91-BAEA-6714-9F84-0F10234AA0BD}"/>
-          </ac:spMkLst>
-        </pc:spChg>
-        <pc:spChg chg="add mod">
-          <ac:chgData name="poke 953" userId="c913613eb4ac0ae9" providerId="LiveId" clId="{99A484BB-246A-43CA-AFF2-5AFF2003EEDE}" dt="2026-04-26T11:17:35.326" v="48"/>
-          <ac:spMkLst>
-            <pc:docMk/>
-            <pc:sldMk cId="3556524927" sldId="261"/>
-            <ac:spMk id="4" creationId="{5D39E20B-EE24-1DBB-C4FB-ABE45F7FCF8E}"/>
-          </ac:spMkLst>
-        </pc:spChg>
-        <pc:spChg chg="add mod">
-          <ac:chgData name="poke 953" userId="c913613eb4ac0ae9" providerId="LiveId" clId="{99A484BB-246A-43CA-AFF2-5AFF2003EEDE}" dt="2026-04-26T11:17:35.326" v="48"/>
-          <ac:spMkLst>
-            <pc:docMk/>
-            <pc:sldMk cId="3556524927" sldId="261"/>
-            <ac:spMk id="5" creationId="{D654BA91-BAEA-6714-9F84-0F10234AA0BD}"/>
-          </ac:spMkLst>
-        </pc:spChg>
-      </pc:sldChg>
-      <pc:sldChg chg="del">
-        <pc:chgData name="poke 953" userId="c913613eb4ac0ae9" providerId="LiveId" clId="{99A484BB-246A-43CA-AFF2-5AFF2003EEDE}" dt="2026-04-26T11:17:59.441" v="54" actId="47"/>
-        <pc:sldMkLst>
-          <pc:docMk/>
-          <pc:sldMk cId="2328205133" sldId="263"/>
-        </pc:sldMkLst>
-      </pc:sldChg>
-      <pc:sldChg chg="addSp delSp modSp del mod">
-        <pc:chgData name="poke 953" userId="c913613eb4ac0ae9" providerId="LiveId" clId="{99A484BB-246A-43CA-AFF2-5AFF2003EEDE}" dt="2026-04-26T11:17:53.539" v="53" actId="47"/>
-        <pc:sldMkLst>
-          <pc:docMk/>
-          <pc:sldMk cId="3481839793" sldId="265"/>
-        </pc:sldMkLst>
-        <pc:spChg chg="add del">
-          <ac:chgData name="poke 953" userId="c913613eb4ac0ae9" providerId="LiveId" clId="{99A484BB-246A-43CA-AFF2-5AFF2003EEDE}" dt="2026-04-26T11:17:35.890" v="49" actId="21"/>
-          <ac:spMkLst>
-            <pc:docMk/>
-            <pc:sldMk cId="3481839793" sldId="265"/>
-            <ac:spMk id="2" creationId="{5D39E20B-EE24-1DBB-C4FB-ABE45F7FCF8E}"/>
-          </ac:spMkLst>
-        </pc:spChg>
-        <pc:spChg chg="add del">
-          <ac:chgData name="poke 953" userId="c913613eb4ac0ae9" providerId="LiveId" clId="{99A484BB-246A-43CA-AFF2-5AFF2003EEDE}" dt="2026-04-26T11:17:35.890" v="49" actId="21"/>
-          <ac:spMkLst>
-            <pc:docMk/>
-            <pc:sldMk cId="3481839793" sldId="265"/>
-            <ac:spMk id="3" creationId="{D654BA91-BAEA-6714-9F84-0F10234AA0BD}"/>
-          </ac:spMkLst>
-        </pc:spChg>
-        <pc:spChg chg="add del mod">
-          <ac:chgData name="poke 953" userId="c913613eb4ac0ae9" providerId="LiveId" clId="{99A484BB-246A-43CA-AFF2-5AFF2003EEDE}" dt="2026-04-26T11:17:35.890" v="49" actId="21"/>
-          <ac:spMkLst>
-            <pc:docMk/>
-            <pc:sldMk cId="3481839793" sldId="265"/>
-            <ac:spMk id="5" creationId="{5FDB4397-65B3-A0BF-E415-AFB4FCC30659}"/>
-          </ac:spMkLst>
-        </pc:spChg>
-        <pc:spChg chg="add del mod">
-          <ac:chgData name="poke 953" userId="c913613eb4ac0ae9" providerId="LiveId" clId="{99A484BB-246A-43CA-AFF2-5AFF2003EEDE}" dt="2026-04-26T11:17:35.890" v="49" actId="21"/>
-          <ac:spMkLst>
-            <pc:docMk/>
-            <pc:sldMk cId="3481839793" sldId="265"/>
-            <ac:spMk id="7" creationId="{5341403F-D77F-C0B8-4DA6-C99422A440B2}"/>
-          </ac:spMkLst>
-        </pc:spChg>
-      </pc:sldChg>
-    </pc:docChg>
-  </pc:docChgLst>
-  <pc:docChgLst>
-    <pc:chgData name="poke 953" userId="c913613eb4ac0ae9" providerId="Windows Live" clId="Web-{750799B2-6321-41FD-873F-01700368E26C}"/>
-    <pc:docChg chg="addSld modSld">
-      <pc:chgData name="poke 953" userId="c913613eb4ac0ae9" providerId="Windows Live" clId="Web-{750799B2-6321-41FD-873F-01700368E26C}" dt="2025-11-18T00:13:47.795" v="286" actId="1076"/>
-      <pc:docMkLst>
-        <pc:docMk/>
-      </pc:docMkLst>
-      <pc:sldChg chg="modSp">
-        <pc:chgData name="poke 953" userId="c913613eb4ac0ae9" providerId="Windows Live" clId="Web-{750799B2-6321-41FD-873F-01700368E26C}" dt="2025-11-17T23:59:30.707" v="48" actId="20577"/>
-        <pc:sldMkLst>
-          <pc:docMk/>
-          <pc:sldMk cId="2033124443" sldId="257"/>
-        </pc:sldMkLst>
-        <pc:spChg chg="mod">
-          <ac:chgData name="poke 953" userId="c913613eb4ac0ae9" providerId="Windows Live" clId="Web-{750799B2-6321-41FD-873F-01700368E26C}" dt="2025-11-17T23:59:30.707" v="48" actId="20577"/>
-          <ac:spMkLst>
-            <pc:docMk/>
-            <pc:sldMk cId="2033124443" sldId="257"/>
-            <ac:spMk id="3" creationId="{945BE91C-4C09-6560-3210-225079A56955}"/>
-          </ac:spMkLst>
-        </pc:spChg>
-      </pc:sldChg>
-      <pc:sldChg chg="addSp delSp modSp new">
-        <pc:chgData name="poke 953" userId="c913613eb4ac0ae9" providerId="Windows Live" clId="Web-{750799B2-6321-41FD-873F-01700368E26C}" dt="2025-11-18T00:10:29.076" v="223"/>
-        <pc:sldMkLst>
-          <pc:docMk/>
-          <pc:sldMk cId="621877034" sldId="258"/>
-        </pc:sldMkLst>
-        <pc:spChg chg="mod">
-          <ac:chgData name="poke 953" userId="c913613eb4ac0ae9" providerId="Windows Live" clId="Web-{750799B2-6321-41FD-873F-01700368E26C}" dt="2025-11-17T23:59:50.895" v="59" actId="20577"/>
-          <ac:spMkLst>
-            <pc:docMk/>
-            <pc:sldMk cId="621877034" sldId="258"/>
-            <ac:spMk id="2" creationId="{CAF17746-388F-8B24-EAFB-794E17F91460}"/>
-          </ac:spMkLst>
-        </pc:spChg>
-        <pc:spChg chg="del">
-          <ac:chgData name="poke 953" userId="c913613eb4ac0ae9" providerId="Windows Live" clId="Web-{750799B2-6321-41FD-873F-01700368E26C}" dt="2025-11-18T00:08:58.458" v="191"/>
-          <ac:spMkLst>
-            <pc:docMk/>
-            <pc:sldMk cId="621877034" sldId="258"/>
-            <ac:spMk id="3" creationId="{F6FAB79D-4BD6-0C22-ED23-CFCC2E0AEF17}"/>
-          </ac:spMkLst>
-        </pc:spChg>
-        <pc:spChg chg="add del mod">
-          <ac:chgData name="poke 953" userId="c913613eb4ac0ae9" providerId="Windows Live" clId="Web-{750799B2-6321-41FD-873F-01700368E26C}" dt="2025-11-18T00:10:29.076" v="223"/>
-          <ac:spMkLst>
-            <pc:docMk/>
-            <pc:sldMk cId="621877034" sldId="258"/>
-            <ac:spMk id="4" creationId="{CA87834F-FBCC-68E1-540B-B9A576E34975}"/>
-          </ac:spMkLst>
-        </pc:spChg>
-      </pc:sldChg>
-      <pc:sldChg chg="addSp delSp modSp new">
-        <pc:chgData name="poke 953" userId="c913613eb4ac0ae9" providerId="Windows Live" clId="Web-{750799B2-6321-41FD-873F-01700368E26C}" dt="2025-11-18T00:13:47.795" v="286" actId="1076"/>
-        <pc:sldMkLst>
-          <pc:docMk/>
-          <pc:sldMk cId="584521698" sldId="259"/>
-        </pc:sldMkLst>
-        <pc:spChg chg="mod">
-          <ac:chgData name="poke 953" userId="c913613eb4ac0ae9" providerId="Windows Live" clId="Web-{750799B2-6321-41FD-873F-01700368E26C}" dt="2025-11-18T00:13:27.606" v="272" actId="20577"/>
-          <ac:spMkLst>
-            <pc:docMk/>
-            <pc:sldMk cId="584521698" sldId="259"/>
-            <ac:spMk id="2" creationId="{5DFAA439-639D-283E-D639-A85F2E2B2276}"/>
-          </ac:spMkLst>
-        </pc:spChg>
-        <pc:spChg chg="del mod">
-          <ac:chgData name="poke 953" userId="c913613eb4ac0ae9" providerId="Windows Live" clId="Web-{750799B2-6321-41FD-873F-01700368E26C}" dt="2025-11-18T00:08:45.363" v="188"/>
-          <ac:spMkLst>
-            <pc:docMk/>
-            <pc:sldMk cId="584521698" sldId="259"/>
-            <ac:spMk id="3" creationId="{CA87834F-FBCC-68E1-540B-B9A576E34975}"/>
-          </ac:spMkLst>
-        </pc:spChg>
-        <pc:spChg chg="add mod">
-          <ac:chgData name="poke 953" userId="c913613eb4ac0ae9" providerId="Windows Live" clId="Web-{750799B2-6321-41FD-873F-01700368E26C}" dt="2025-11-18T00:13:47.717" v="274" actId="1076"/>
-          <ac:spMkLst>
-            <pc:docMk/>
-            <pc:sldMk cId="584521698" sldId="259"/>
-            <ac:spMk id="4" creationId="{5DC2E94C-8511-6AAF-81FC-C37DAEBE0E19}"/>
-          </ac:spMkLst>
-        </pc:spChg>
-        <pc:spChg chg="add mod">
-          <ac:chgData name="poke 953" userId="c913613eb4ac0ae9" providerId="Windows Live" clId="Web-{750799B2-6321-41FD-873F-01700368E26C}" dt="2025-11-18T00:13:47.732" v="275" actId="1076"/>
-          <ac:spMkLst>
-            <pc:docMk/>
-            <pc:sldMk cId="584521698" sldId="259"/>
-            <ac:spMk id="5" creationId="{F064B1B7-8AFA-6762-17DD-D5B76FD6794D}"/>
-          </ac:spMkLst>
-        </pc:spChg>
-        <pc:spChg chg="add mod">
-          <ac:chgData name="poke 953" userId="c913613eb4ac0ae9" providerId="Windows Live" clId="Web-{750799B2-6321-41FD-873F-01700368E26C}" dt="2025-11-18T00:13:47.732" v="276" actId="1076"/>
-          <ac:spMkLst>
-            <pc:docMk/>
-            <pc:sldMk cId="584521698" sldId="259"/>
-            <ac:spMk id="6" creationId="{A1E9504A-CE51-B369-8640-A44E9231CE9D}"/>
-          </ac:spMkLst>
-        </pc:spChg>
-        <pc:spChg chg="add mod">
-          <ac:chgData name="poke 953" userId="c913613eb4ac0ae9" providerId="Windows Live" clId="Web-{750799B2-6321-41FD-873F-01700368E26C}" dt="2025-11-18T00:13:47.748" v="277" actId="1076"/>
-          <ac:spMkLst>
-            <pc:docMk/>
-            <pc:sldMk cId="584521698" sldId="259"/>
-            <ac:spMk id="7" creationId="{165CB523-A997-AC0A-A74A-350ACDB73A2F}"/>
-          </ac:spMkLst>
-        </pc:spChg>
-        <pc:spChg chg="add mod">
-          <ac:chgData name="poke 953" userId="c913613eb4ac0ae9" providerId="Windows Live" clId="Web-{750799B2-6321-41FD-873F-01700368E26C}" dt="2025-11-18T00:13:47.748" v="278" actId="1076"/>
-          <ac:spMkLst>
-            <pc:docMk/>
-            <pc:sldMk cId="584521698" sldId="259"/>
-            <ac:spMk id="8" creationId="{60C32BCE-541F-288E-AC71-5D31FB56FABB}"/>
-          </ac:spMkLst>
-        </pc:spChg>
-        <pc:spChg chg="add mod">
-          <ac:chgData name="poke 953" userId="c913613eb4ac0ae9" providerId="Windows Live" clId="Web-{750799B2-6321-41FD-873F-01700368E26C}" dt="2025-11-18T00:13:47.764" v="279" actId="1076"/>
-          <ac:spMkLst>
-            <pc:docMk/>
-            <pc:sldMk cId="584521698" sldId="259"/>
-            <ac:spMk id="9" creationId="{2BFFCAB5-DE67-9473-9566-D6A96E1D995A}"/>
-          </ac:spMkLst>
-        </pc:spChg>
-        <pc:spChg chg="add mod">
-          <ac:chgData name="poke 953" userId="c913613eb4ac0ae9" providerId="Windows Live" clId="Web-{750799B2-6321-41FD-873F-01700368E26C}" dt="2025-11-18T00:13:47.795" v="285" actId="1076"/>
-          <ac:spMkLst>
-            <pc:docMk/>
-            <pc:sldMk cId="584521698" sldId="259"/>
-            <ac:spMk id="16" creationId="{B0627B92-AFD2-E960-17C1-98F1A3B87450}"/>
-          </ac:spMkLst>
-        </pc:spChg>
-        <pc:spChg chg="add del mod">
-          <ac:chgData name="poke 953" userId="c913613eb4ac0ae9" providerId="Windows Live" clId="Web-{750799B2-6321-41FD-873F-01700368E26C}" dt="2025-11-18T00:13:35.919" v="273"/>
-          <ac:spMkLst>
-            <pc:docMk/>
-            <pc:sldMk cId="584521698" sldId="259"/>
-            <ac:spMk id="19" creationId="{1A23AC74-838A-B747-E430-1BA1709D00A2}"/>
-          </ac:spMkLst>
-        </pc:spChg>
-        <pc:cxnChg chg="add del">
-          <ac:chgData name="poke 953" userId="c913613eb4ac0ae9" providerId="Windows Live" clId="Web-{750799B2-6321-41FD-873F-01700368E26C}" dt="2025-11-18T00:05:56.672" v="156"/>
-          <ac:cxnSpMkLst>
-            <pc:docMk/>
-            <pc:sldMk cId="584521698" sldId="259"/>
-            <ac:cxnSpMk id="10" creationId="{FE34D541-2882-2B5E-A991-4BFC6E4CD61A}"/>
-          </ac:cxnSpMkLst>
-        </pc:cxnChg>
-        <pc:cxnChg chg="add mod">
-          <ac:chgData name="poke 953" userId="c913613eb4ac0ae9" providerId="Windows Live" clId="Web-{750799B2-6321-41FD-873F-01700368E26C}" dt="2025-11-18T00:13:47.764" v="280" actId="1076"/>
-          <ac:cxnSpMkLst>
-            <pc:docMk/>
-            <pc:sldMk cId="584521698" sldId="259"/>
-            <ac:cxnSpMk id="11" creationId="{E072F568-955B-B7B2-A1F9-BF1515245194}"/>
-          </ac:cxnSpMkLst>
-        </pc:cxnChg>
-        <pc:cxnChg chg="add mod">
-          <ac:chgData name="poke 953" userId="c913613eb4ac0ae9" providerId="Windows Live" clId="Web-{750799B2-6321-41FD-873F-01700368E26C}" dt="2025-11-18T00:13:47.764" v="281" actId="1076"/>
-          <ac:cxnSpMkLst>
-            <pc:docMk/>
-            <pc:sldMk cId="584521698" sldId="259"/>
-            <ac:cxnSpMk id="12" creationId="{88FFA6AB-47C3-1A49-83CB-F8FED3EB3264}"/>
-          </ac:cxnSpMkLst>
-        </pc:cxnChg>
-        <pc:cxnChg chg="add mod">
-          <ac:chgData name="poke 953" userId="c913613eb4ac0ae9" providerId="Windows Live" clId="Web-{750799B2-6321-41FD-873F-01700368E26C}" dt="2025-11-18T00:13:47.779" v="282" actId="1076"/>
-          <ac:cxnSpMkLst>
-            <pc:docMk/>
-            <pc:sldMk cId="584521698" sldId="259"/>
-            <ac:cxnSpMk id="13" creationId="{F357EF74-AAE6-4DBB-C2C5-B2C664C5C047}"/>
-          </ac:cxnSpMkLst>
-        </pc:cxnChg>
-        <pc:cxnChg chg="add mod">
-          <ac:chgData name="poke 953" userId="c913613eb4ac0ae9" providerId="Windows Live" clId="Web-{750799B2-6321-41FD-873F-01700368E26C}" dt="2025-11-18T00:13:47.779" v="283" actId="1076"/>
-          <ac:cxnSpMkLst>
-            <pc:docMk/>
-            <pc:sldMk cId="584521698" sldId="259"/>
-            <ac:cxnSpMk id="14" creationId="{2EADF498-4AAF-C653-9FB6-5FF00BE6D94D}"/>
-          </ac:cxnSpMkLst>
-        </pc:cxnChg>
-        <pc:cxnChg chg="add mod">
-          <ac:chgData name="poke 953" userId="c913613eb4ac0ae9" providerId="Windows Live" clId="Web-{750799B2-6321-41FD-873F-01700368E26C}" dt="2025-11-18T00:13:47.779" v="284" actId="1076"/>
-          <ac:cxnSpMkLst>
-            <pc:docMk/>
-            <pc:sldMk cId="584521698" sldId="259"/>
-            <ac:cxnSpMk id="15" creationId="{B543BFAD-6201-383A-58F2-00F2715A9DD7}"/>
-          </ac:cxnSpMkLst>
-        </pc:cxnChg>
-        <pc:cxnChg chg="add mod">
-          <ac:chgData name="poke 953" userId="c913613eb4ac0ae9" providerId="Windows Live" clId="Web-{750799B2-6321-41FD-873F-01700368E26C}" dt="2025-11-18T00:13:47.795" v="286" actId="1076"/>
-          <ac:cxnSpMkLst>
-            <pc:docMk/>
-            <pc:sldMk cId="584521698" sldId="259"/>
-            <ac:cxnSpMk id="17" creationId="{414247FA-FC08-C026-2B63-40409D1EF679}"/>
-          </ac:cxnSpMkLst>
-        </pc:cxnChg>
-      </pc:sldChg>
-      <pc:sldChg chg="addSp delSp modSp new">
-        <pc:chgData name="poke 953" userId="c913613eb4ac0ae9" providerId="Windows Live" clId="Web-{750799B2-6321-41FD-873F-01700368E26C}" dt="2025-11-18T00:11:40.252" v="255" actId="20577"/>
-        <pc:sldMkLst>
-          <pc:docMk/>
-          <pc:sldMk cId="1676052078" sldId="260"/>
-        </pc:sldMkLst>
-        <pc:spChg chg="mod">
-          <ac:chgData name="poke 953" userId="c913613eb4ac0ae9" providerId="Windows Live" clId="Web-{750799B2-6321-41FD-873F-01700368E26C}" dt="2025-11-18T00:11:40.252" v="255" actId="20577"/>
-          <ac:spMkLst>
-            <pc:docMk/>
-            <pc:sldMk cId="1676052078" sldId="260"/>
-            <ac:spMk id="2" creationId="{AD0CF682-A829-1CE0-BEEC-E4407D9971FB}"/>
-          </ac:spMkLst>
-        </pc:spChg>
-        <pc:spChg chg="del mod">
-          <ac:chgData name="poke 953" userId="c913613eb4ac0ae9" providerId="Windows Live" clId="Web-{750799B2-6321-41FD-873F-01700368E26C}" dt="2025-11-18T00:10:45.827" v="227"/>
-          <ac:spMkLst>
-            <pc:docMk/>
-            <pc:sldMk cId="1676052078" sldId="260"/>
-            <ac:spMk id="3" creationId="{DCDCF09D-D15A-5263-7894-514F13C5C247}"/>
-          </ac:spMkLst>
-        </pc:spChg>
-        <pc:spChg chg="add mod">
-          <ac:chgData name="poke 953" userId="c913613eb4ac0ae9" providerId="Windows Live" clId="Web-{750799B2-6321-41FD-873F-01700368E26C}" dt="2025-11-18T00:10:53.468" v="229" actId="20577"/>
-          <ac:spMkLst>
-            <pc:docMk/>
-            <pc:sldMk cId="1676052078" sldId="260"/>
-            <ac:spMk id="4" creationId="{CA87834F-FBCC-68E1-540B-B9A576E34975}"/>
-          </ac:spMkLst>
-        </pc:spChg>
       </pc:sldChg>
     </pc:docChg>
   </pc:docChgLst>
@@ -1444,7 +1444,7 @@
           <a:p>
             <a:fld id="{62FB3462-AC7E-433A-8CF8-798B8CC86C6F}" type="datetimeFigureOut">
               <a:rPr lang="fr-FR" smtClean="0"/>
-              <a:t>26/04/2026</a:t>
+              <a:t>04/05/2026</a:t>
             </a:fld>
             <a:endParaRPr lang="fr-FR"/>
           </a:p>
@@ -1923,7 +1923,7 @@
           <a:bodyPr/>
           <a:lstStyle/>
           <a:p>
-            <a:fld id="{B97FBB94-5340-471E-94ED-8CA8817528A2}" type="slidenum">
+            <a:fld id="{D5985EDB-9CB5-4924-892C-CEAA459BBE1E}" type="slidenum">
               <a:rPr lang="fr-FR" smtClean="0"/>
               <a:t>2</a:t>
             </a:fld>
@@ -1934,7 +1934,7 @@
     </p:spTree>
     <p:extLst>
       <p:ext uri="{BB962C8B-B14F-4D97-AF65-F5344CB8AC3E}">
-        <p14:creationId xmlns:p14="http://schemas.microsoft.com/office/powerpoint/2010/main" val="166140220"/>
+        <p14:creationId xmlns:p14="http://schemas.microsoft.com/office/powerpoint/2010/main" val="3650218759"/>
       </p:ext>
     </p:extLst>
   </p:cSld>
@@ -2063,6 +2063,99 @@
     <p:extLst>
       <p:ext uri="{BB962C8B-B14F-4D97-AF65-F5344CB8AC3E}">
         <p14:creationId xmlns:p14="http://schemas.microsoft.com/office/powerpoint/2010/main" val="4043971106"/>
+      </p:ext>
+    </p:extLst>
+  </p:cSld>
+  <p:clrMapOvr>
+    <a:masterClrMapping/>
+  </p:clrMapOvr>
+</p:notes>
+</file>
+
+<file path=ppt/notesSlides/notesSlide3.xml><?xml version="1.0" encoding="utf-8"?>
+<p:notes xmlns:a="http://schemas.openxmlformats.org/drawingml/2006/main" xmlns:r="http://schemas.openxmlformats.org/officeDocument/2006/relationships" xmlns:p="http://schemas.openxmlformats.org/presentationml/2006/main">
+  <p:cSld>
+    <p:spTree>
+      <p:nvGrpSpPr>
+        <p:cNvPr id="1" name=""/>
+        <p:cNvGrpSpPr/>
+        <p:nvPr/>
+      </p:nvGrpSpPr>
+      <p:grpSpPr>
+        <a:xfrm>
+          <a:off x="0" y="0"/>
+          <a:ext cx="0" cy="0"/>
+          <a:chOff x="0" y="0"/>
+          <a:chExt cx="0" cy="0"/>
+        </a:xfrm>
+      </p:grpSpPr>
+      <p:sp>
+        <p:nvSpPr>
+          <p:cNvPr id="2" name="Espace réservé de l'image des diapositives 1"/>
+          <p:cNvSpPr>
+            <a:spLocks noGrp="1" noRot="1" noChangeAspect="1"/>
+          </p:cNvSpPr>
+          <p:nvPr>
+            <p:ph type="sldImg"/>
+          </p:nvPr>
+        </p:nvSpPr>
+        <p:spPr/>
+      </p:sp>
+      <p:sp>
+        <p:nvSpPr>
+          <p:cNvPr id="3" name="Espace réservé des notes 2"/>
+          <p:cNvSpPr>
+            <a:spLocks noGrp="1"/>
+          </p:cNvSpPr>
+          <p:nvPr>
+            <p:ph type="body" idx="1"/>
+          </p:nvPr>
+        </p:nvSpPr>
+        <p:spPr/>
+        <p:txBody>
+          <a:bodyPr/>
+          <a:lstStyle/>
+          <a:p>
+            <a:r>
+              <a:rPr lang="fr-FR" dirty="0"/>
+              <a:t>Accueil + ambiance d’équipe</a:t>
+            </a:r>
+          </a:p>
+          <a:p>
+            <a:r>
+              <a:rPr lang="fr-FR" dirty="0"/>
+              <a:t>Beaucoup appris sur l’ambiance d’entreprise</a:t>
+            </a:r>
+          </a:p>
+        </p:txBody>
+      </p:sp>
+      <p:sp>
+        <p:nvSpPr>
+          <p:cNvPr id="4" name="Espace réservé du numéro de diapositive 3"/>
+          <p:cNvSpPr>
+            <a:spLocks noGrp="1"/>
+          </p:cNvSpPr>
+          <p:nvPr>
+            <p:ph type="sldNum" sz="quarter" idx="5"/>
+          </p:nvPr>
+        </p:nvSpPr>
+        <p:spPr/>
+        <p:txBody>
+          <a:bodyPr/>
+          <a:lstStyle/>
+          <a:p>
+            <a:fld id="{B97FBB94-5340-471E-94ED-8CA8817528A2}" type="slidenum">
+              <a:rPr lang="fr-FR" smtClean="0"/>
+              <a:t>5</a:t>
+            </a:fld>
+            <a:endParaRPr lang="fr-FR"/>
+          </a:p>
+        </p:txBody>
+      </p:sp>
+    </p:spTree>
+    <p:extLst>
+      <p:ext uri="{BB962C8B-B14F-4D97-AF65-F5344CB8AC3E}">
+        <p14:creationId xmlns:p14="http://schemas.microsoft.com/office/powerpoint/2010/main" val="3875386785"/>
       </p:ext>
     </p:extLst>
   </p:cSld>
@@ -2223,7 +2316,7 @@
           <a:p>
             <a:fld id="{C128FA71-3A18-48C0-980F-4B68F7F63042}" type="datetime1">
               <a:rPr lang="en-US" smtClean="0"/>
-              <a:t>4/26/2026</a:t>
+              <a:t>5/4/2026</a:t>
             </a:fld>
             <a:endParaRPr lang="en-US"/>
           </a:p>
@@ -2431,7 +2524,7 @@
           <a:p>
             <a:fld id="{7104EDB3-C0E8-45F8-9E1D-1B6C8D1880C0}" type="datetime1">
               <a:rPr lang="en-US" smtClean="0"/>
-              <a:t>4/26/2026</a:t>
+              <a:t>5/4/2026</a:t>
             </a:fld>
             <a:endParaRPr lang="en-US"/>
           </a:p>
@@ -2639,7 +2732,7 @@
           <a:p>
             <a:fld id="{9CF0EC4B-54ED-4041-B552-9BA760FA3DBA}" type="datetime1">
               <a:rPr lang="en-US" smtClean="0"/>
-              <a:t>4/26/2026</a:t>
+              <a:t>5/4/2026</a:t>
             </a:fld>
             <a:endParaRPr lang="en-US"/>
           </a:p>
@@ -2837,7 +2930,7 @@
           <a:p>
             <a:fld id="{51C1210E-201E-4473-82AC-2466F5386C38}" type="datetime1">
               <a:rPr lang="en-US" smtClean="0"/>
-              <a:t>4/26/2026</a:t>
+              <a:t>5/4/2026</a:t>
             </a:fld>
             <a:endParaRPr lang="en-US"/>
           </a:p>
@@ -3114,7 +3207,7 @@
           <a:p>
             <a:fld id="{B01EA198-6CAB-4B8F-B93F-1F9C8C4B6CE7}" type="datetime1">
               <a:rPr lang="en-US" smtClean="0"/>
-              <a:t>4/26/2026</a:t>
+              <a:t>5/4/2026</a:t>
             </a:fld>
             <a:endParaRPr lang="en-US"/>
           </a:p>
@@ -3384,7 +3477,7 @@
           <a:p>
             <a:fld id="{CA06041F-4525-44D5-AA4F-332294BF1F56}" type="datetime1">
               <a:rPr lang="en-US" smtClean="0"/>
-              <a:t>4/26/2026</a:t>
+              <a:t>5/4/2026</a:t>
             </a:fld>
             <a:endParaRPr lang="en-US"/>
           </a:p>
@@ -3806,7 +3899,7 @@
           <a:p>
             <a:fld id="{F9557091-BBDF-4EB9-BA6B-2BB67AC4FC0F}" type="datetime1">
               <a:rPr lang="en-US" smtClean="0"/>
-              <a:t>4/26/2026</a:t>
+              <a:t>5/4/2026</a:t>
             </a:fld>
             <a:endParaRPr lang="en-US"/>
           </a:p>
@@ -3947,7 +4040,7 @@
           <a:p>
             <a:fld id="{2D6B226B-77A6-410C-9796-083F278E0125}" type="datetime1">
               <a:rPr lang="en-US" smtClean="0"/>
-              <a:t>4/26/2026</a:t>
+              <a:t>5/4/2026</a:t>
             </a:fld>
             <a:endParaRPr lang="en-US"/>
           </a:p>
@@ -4060,7 +4153,7 @@
           <a:p>
             <a:fld id="{A23A578B-D289-4C40-8593-3D356C49DA58}" type="datetime1">
               <a:rPr lang="en-US" smtClean="0"/>
-              <a:t>4/26/2026</a:t>
+              <a:t>5/4/2026</a:t>
             </a:fld>
             <a:endParaRPr lang="en-US"/>
           </a:p>
@@ -4377,7 +4470,7 @@
           <a:p>
             <a:fld id="{713DFAE3-14DB-48A7-A80F-80DDB072CE3D}" type="datetime1">
               <a:rPr lang="en-US" smtClean="0"/>
-              <a:t>4/26/2026</a:t>
+              <a:t>5/4/2026</a:t>
             </a:fld>
             <a:endParaRPr lang="en-US"/>
           </a:p>
@@ -4670,7 +4763,7 @@
           <a:p>
             <a:fld id="{92C5EAEF-6478-4102-8F5D-A5FE9FC97ACB}" type="datetime1">
               <a:rPr lang="en-US" smtClean="0"/>
-              <a:t>4/26/2026</a:t>
+              <a:t>5/4/2026</a:t>
             </a:fld>
             <a:endParaRPr lang="en-US"/>
           </a:p>
@@ -4909,7 +5002,7 @@
           <a:p>
             <a:fld id="{67F45AC6-C491-4585-A584-9CE2AF7D5500}" type="datetime1">
               <a:rPr lang="en-US" smtClean="0"/>
-              <a:t>4/26/2026</a:t>
+              <a:t>5/4/2026</a:t>
             </a:fld>
             <a:endParaRPr lang="en-US"/>
           </a:p>
@@ -5407,64 +5500,6 @@
           </a:p>
         </p:txBody>
       </p:sp>
-      <p:sp>
-        <p:nvSpPr>
-          <p:cNvPr id="2" name="Titre 1"/>
-          <p:cNvSpPr>
-            <a:spLocks noGrp="1"/>
-          </p:cNvSpPr>
-          <p:nvPr>
-            <p:ph type="ctrTitle"/>
-          </p:nvPr>
-        </p:nvSpPr>
-        <p:spPr>
-          <a:xfrm>
-            <a:off x="8388642" y="1104181"/>
-            <a:ext cx="3406543" cy="2779731"/>
-          </a:xfrm>
-        </p:spPr>
-        <p:txBody>
-          <a:bodyPr>
-            <a:normAutofit/>
-          </a:bodyPr>
-          <a:lstStyle/>
-          <a:p>
-            <a:r>
-              <a:rPr lang="fr-FR" sz="3600"/>
-              <a:t>Stage de 1ère année en BTS SIO SLAM</a:t>
-            </a:r>
-          </a:p>
-        </p:txBody>
-      </p:sp>
-      <p:sp>
-        <p:nvSpPr>
-          <p:cNvPr id="3" name="Sous-titre 2"/>
-          <p:cNvSpPr>
-            <a:spLocks noGrp="1"/>
-          </p:cNvSpPr>
-          <p:nvPr>
-            <p:ph type="subTitle" idx="1"/>
-          </p:nvPr>
-        </p:nvSpPr>
-        <p:spPr>
-          <a:xfrm>
-            <a:off x="8388643" y="3901164"/>
-            <a:ext cx="3406542" cy="1542104"/>
-          </a:xfrm>
-        </p:spPr>
-        <p:txBody>
-          <a:bodyPr vert="horz" lIns="91440" tIns="45720" rIns="91440" bIns="45720" rtlCol="0">
-            <a:normAutofit/>
-          </a:bodyPr>
-          <a:lstStyle/>
-          <a:p>
-            <a:r>
-              <a:rPr lang="fr-FR" b="1" i="1" dirty="0"/>
-              <a:t>LA CNP Assurance protection social</a:t>
-            </a:r>
-          </a:p>
-        </p:txBody>
-      </p:sp>
       <p:pic>
         <p:nvPicPr>
           <p:cNvPr id="7" name="Image 6" descr="Une image contenant texte, Graphique, logo, Police&#10;&#10;Le contenu généré par l’IA peut être incorrect.">
@@ -5495,6 +5530,64 @@
           </a:prstGeom>
         </p:spPr>
       </p:pic>
+      <p:sp>
+        <p:nvSpPr>
+          <p:cNvPr id="2" name="Titre 1"/>
+          <p:cNvSpPr>
+            <a:spLocks noGrp="1"/>
+          </p:cNvSpPr>
+          <p:nvPr>
+            <p:ph type="ctrTitle"/>
+          </p:nvPr>
+        </p:nvSpPr>
+        <p:spPr>
+          <a:xfrm>
+            <a:off x="8388642" y="1104181"/>
+            <a:ext cx="3406543" cy="2779731"/>
+          </a:xfrm>
+        </p:spPr>
+        <p:txBody>
+          <a:bodyPr>
+            <a:normAutofit/>
+          </a:bodyPr>
+          <a:lstStyle/>
+          <a:p>
+            <a:r>
+              <a:rPr lang="fr-FR" sz="3600" dirty="0"/>
+              <a:t>Stage de 1ère année en BTS SIO SLAM</a:t>
+            </a:r>
+          </a:p>
+        </p:txBody>
+      </p:sp>
+      <p:sp>
+        <p:nvSpPr>
+          <p:cNvPr id="3" name="Sous-titre 2"/>
+          <p:cNvSpPr>
+            <a:spLocks noGrp="1"/>
+          </p:cNvSpPr>
+          <p:nvPr>
+            <p:ph type="subTitle" idx="1"/>
+          </p:nvPr>
+        </p:nvSpPr>
+        <p:spPr>
+          <a:xfrm>
+            <a:off x="8388643" y="3901164"/>
+            <a:ext cx="3406542" cy="1542104"/>
+          </a:xfrm>
+        </p:spPr>
+        <p:txBody>
+          <a:bodyPr vert="horz" lIns="91440" tIns="45720" rIns="91440" bIns="45720" rtlCol="0">
+            <a:normAutofit/>
+          </a:bodyPr>
+          <a:lstStyle/>
+          <a:p>
+            <a:r>
+              <a:rPr lang="fr-FR" b="1" i="1" dirty="0"/>
+              <a:t>LA CNP Assurance protection social</a:t>
+            </a:r>
+          </a:p>
+        </p:txBody>
+      </p:sp>
     </p:spTree>
     <p:extLst>
       <p:ext uri="{BB962C8B-B14F-4D97-AF65-F5344CB8AC3E}">
@@ -5525,6 +5618,111 @@
           <a:chExt cx="0" cy="0"/>
         </a:xfrm>
       </p:grpSpPr>
+      <p:pic>
+        <p:nvPicPr>
+          <p:cNvPr id="4" name="Picture 4">
+            <a:extLst>
+              <a:ext uri="{FF2B5EF4-FFF2-40B4-BE49-F238E27FC236}">
+                <a16:creationId xmlns:a16="http://schemas.microsoft.com/office/drawing/2014/main" id="{7470D390-F084-B05F-FB5C-8761342F830E}"/>
+              </a:ext>
+            </a:extLst>
+          </p:cNvPr>
+          <p:cNvPicPr>
+            <a:picLocks noChangeAspect="1" noChangeArrowheads="1"/>
+          </p:cNvPicPr>
+          <p:nvPr/>
+        </p:nvPicPr>
+        <p:blipFill>
+          <a:blip r:embed="rId3">
+            <a:extLst>
+              <a:ext uri="{28A0092B-C50C-407E-A947-70E740481C1C}">
+                <a14:useLocalDpi xmlns:a14="http://schemas.microsoft.com/office/drawing/2010/main" val="0"/>
+              </a:ext>
+            </a:extLst>
+          </a:blip>
+          <a:srcRect/>
+          <a:stretch>
+            <a:fillRect/>
+          </a:stretch>
+        </p:blipFill>
+        <p:spPr bwMode="auto">
+          <a:xfrm>
+            <a:off x="0" y="0"/>
+            <a:ext cx="12191999" cy="6858000"/>
+          </a:xfrm>
+          <a:prstGeom prst="rect">
+            <a:avLst/>
+          </a:prstGeom>
+          <a:noFill/>
+          <a:extLst>
+            <a:ext uri="{909E8E84-426E-40DD-AFC4-6F175D3DCCD1}">
+              <a14:hiddenFill xmlns:a14="http://schemas.microsoft.com/office/drawing/2010/main">
+                <a:solidFill>
+                  <a:srgbClr val="FFFFFF"/>
+                </a:solidFill>
+              </a14:hiddenFill>
+            </a:ext>
+          </a:extLst>
+        </p:spPr>
+      </p:pic>
+      <p:sp>
+        <p:nvSpPr>
+          <p:cNvPr id="5" name="Rectangle 4">
+            <a:extLst>
+              <a:ext uri="{FF2B5EF4-FFF2-40B4-BE49-F238E27FC236}">
+                <a16:creationId xmlns:a16="http://schemas.microsoft.com/office/drawing/2014/main" id="{91D25942-5DF9-0615-A383-ED35455BF009}"/>
+              </a:ext>
+            </a:extLst>
+          </p:cNvPr>
+          <p:cNvSpPr/>
+          <p:nvPr/>
+        </p:nvSpPr>
+        <p:spPr>
+          <a:xfrm>
+            <a:off x="0" y="0"/>
+            <a:ext cx="12191999" cy="6858000"/>
+          </a:xfrm>
+          <a:prstGeom prst="rect">
+            <a:avLst/>
+          </a:prstGeom>
+          <a:solidFill>
+            <a:schemeClr val="lt1">
+              <a:alpha val="25000"/>
+            </a:schemeClr>
+          </a:solidFill>
+          <a:effectLst>
+            <a:outerShdw blurRad="50800" dist="50800" dir="5400000" sx="1000" sy="1000" algn="ctr" rotWithShape="0">
+              <a:srgbClr val="000000">
+                <a:alpha val="99000"/>
+              </a:srgbClr>
+            </a:outerShdw>
+            <a:reflection stA="95000" endPos="0" dist="50800" dir="5400000" sy="-100000" algn="bl" rotWithShape="0"/>
+            <a:softEdge rad="31750"/>
+          </a:effectLst>
+        </p:spPr>
+        <p:style>
+          <a:lnRef idx="2">
+            <a:schemeClr val="accent6"/>
+          </a:lnRef>
+          <a:fillRef idx="1">
+            <a:schemeClr val="lt1"/>
+          </a:fillRef>
+          <a:effectRef idx="0">
+            <a:schemeClr val="accent6"/>
+          </a:effectRef>
+          <a:fontRef idx="minor">
+            <a:schemeClr val="dk1"/>
+          </a:fontRef>
+        </p:style>
+        <p:txBody>
+          <a:bodyPr rtlCol="0" anchor="ctr"/>
+          <a:lstStyle/>
+          <a:p>
+            <a:pPr algn="ctr"/>
+            <a:endParaRPr lang="fr-FR"/>
+          </a:p>
+        </p:txBody>
+      </p:sp>
       <p:sp>
         <p:nvSpPr>
           <p:cNvPr id="2" name="Titre 1">
@@ -5546,9 +5744,10 @@
           <a:bodyPr/>
           <a:lstStyle/>
           <a:p>
+            <a:pPr algn="ctr"/>
             <a:r>
               <a:rPr lang="fr-FR" dirty="0"/>
-              <a:t>présentation</a:t>
+              <a:t>Présentation</a:t>
             </a:r>
           </a:p>
         </p:txBody>
@@ -5634,23 +5833,7 @@
                 <a:ea typeface="+mn-lt"/>
                 <a:cs typeface="Arial" panose="020B0604020202020204" pitchFamily="34" charset="0"/>
               </a:rPr>
-              <a:t>SA à conseil d'administration (</a:t>
-            </a:r>
-            <a:r>
-              <a:rPr lang="fr-FR" sz="2800" b="1" dirty="0" err="1">
-                <a:latin typeface="Arial" panose="020B0604020202020204" pitchFamily="34" charset="0"/>
-                <a:ea typeface="+mn-lt"/>
-                <a:cs typeface="Arial" panose="020B0604020202020204" pitchFamily="34" charset="0"/>
-              </a:rPr>
-              <a:t>s.a.i</a:t>
-            </a:r>
-            <a:r>
-              <a:rPr lang="fr-FR" sz="2800" b="1" dirty="0">
-                <a:latin typeface="Arial" panose="020B0604020202020204" pitchFamily="34" charset="0"/>
-                <a:ea typeface="+mn-lt"/>
-                <a:cs typeface="Arial" panose="020B0604020202020204" pitchFamily="34" charset="0"/>
-              </a:rPr>
-              <a:t>.)</a:t>
+              <a:t>SA à conseil d'administration (S.A.I.)</a:t>
             </a:r>
           </a:p>
           <a:p>
@@ -5668,15 +5851,7 @@
                 <a:latin typeface="Arial" panose="020B0604020202020204" pitchFamily="34" charset="0"/>
                 <a:cs typeface="Arial" panose="020B0604020202020204" pitchFamily="34" charset="0"/>
               </a:rPr>
-              <a:t> Christophe </a:t>
-            </a:r>
-            <a:r>
-              <a:rPr lang="fr-FR" sz="2800" b="1" i="0" dirty="0" err="1">
-                <a:effectLst/>
-                <a:latin typeface="Arial" panose="020B0604020202020204" pitchFamily="34" charset="0"/>
-                <a:cs typeface="Arial" panose="020B0604020202020204" pitchFamily="34" charset="0"/>
-              </a:rPr>
-              <a:t>Harrigan</a:t>
+              <a:t> Christophe Harrigan</a:t>
             </a:r>
             <a:endParaRPr lang="fr-FR" sz="2800" b="1" dirty="0">
               <a:latin typeface="Arial" panose="020B0604020202020204" pitchFamily="34" charset="0"/>
@@ -5690,7 +5865,17 @@
                 <a:latin typeface="Arial" panose="020B0604020202020204" pitchFamily="34" charset="0"/>
                 <a:cs typeface="Arial" panose="020B0604020202020204" pitchFamily="34" charset="0"/>
               </a:rPr>
-              <a:t>Chiffres d'affaires:39,1 Md </a:t>
+              <a:t>Chiffres d'affaires:39,1 Md</a:t>
+            </a:r>
+          </a:p>
+          <a:p>
+            <a:pPr lvl="1"/>
+            <a:r>
+              <a:rPr lang="fr-FR" sz="2800" b="1" dirty="0">
+                <a:latin typeface="Arial" panose="020B0604020202020204" pitchFamily="34" charset="0"/>
+                <a:cs typeface="Arial" panose="020B0604020202020204" pitchFamily="34" charset="0"/>
+              </a:rPr>
+              <a:t>11 rue Brillat savarin,13 arrondissement de paris </a:t>
             </a:r>
             <a:endParaRPr lang="fr-FR" sz="3200" b="1" dirty="0">
               <a:latin typeface="Arial" panose="020B0604020202020204" pitchFamily="34" charset="0"/>
@@ -6803,8 +6988,8 @@
         </p:nvSpPr>
         <p:spPr>
           <a:xfrm>
-            <a:off x="612648" y="548640"/>
-            <a:ext cx="11343920" cy="5801710"/>
+            <a:off x="2449994" y="2331720"/>
+            <a:ext cx="7992967" cy="2194560"/>
           </a:xfrm>
         </p:spPr>
         <p:txBody>
@@ -6814,15 +6999,6 @@
           <a:lstStyle/>
           <a:p>
             <a:pPr algn="ctr"/>
-            <a:br>
-              <a:rPr lang="fr-FR" sz="5400" dirty="0"/>
-            </a:br>
-            <a:br>
-              <a:rPr lang="fr-FR" sz="5400" dirty="0"/>
-            </a:br>
-            <a:br>
-              <a:rPr lang="fr-FR" sz="5400" dirty="0"/>
-            </a:br>
             <a:r>
               <a:rPr lang="fr-FR" sz="5400" dirty="0"/>
               <a:t>Conclusion</a:t>

--- a/Presentation stage 1 brûlé quentin.pptx
+++ b/Presentation stage 1 brûlé quentin.pptx
@@ -1444,7 +1444,7 @@
           <a:p>
             <a:fld id="{62FB3462-AC7E-433A-8CF8-798B8CC86C6F}" type="datetimeFigureOut">
               <a:rPr lang="fr-FR" smtClean="0"/>
-              <a:t>04/05/2026</a:t>
+              <a:t>05/05/2026</a:t>
             </a:fld>
             <a:endParaRPr lang="fr-FR"/>
           </a:p>
@@ -1755,155 +1755,6 @@
           <a:bodyPr/>
           <a:lstStyle/>
           <a:p>
-            <a:pPr lvl="1"/>
-            <a:r>
-              <a:rPr lang="fr-FR" sz="1200" dirty="0">
-                <a:solidFill>
-                  <a:srgbClr val="282727"/>
-                </a:solidFill>
-                <a:ea typeface="+mn-lt"/>
-                <a:cs typeface="+mn-lt"/>
-              </a:rPr>
-              <a:t>détenue à 65% par CNP Assurances</a:t>
-            </a:r>
-            <a:endParaRPr lang="fr-FR" sz="1200" b="1" dirty="0">
-              <a:solidFill>
-                <a:srgbClr val="282727"/>
-              </a:solidFill>
-              <a:ea typeface="+mn-lt"/>
-              <a:cs typeface="+mn-lt"/>
-            </a:endParaRPr>
-          </a:p>
-          <a:p>
-            <a:pPr lvl="1"/>
-            <a:r>
-              <a:rPr lang="fr-FR" sz="1200" dirty="0">
-                <a:solidFill>
-                  <a:srgbClr val="282727"/>
-                </a:solidFill>
-                <a:ea typeface="+mn-lt"/>
-                <a:cs typeface="+mn-lt"/>
-              </a:rPr>
-              <a:t>Détenus à 35% par la mutuelle général</a:t>
-            </a:r>
-          </a:p>
-          <a:p>
-            <a:pPr marL="457200" marR="0" lvl="1" indent="0" algn="l" defTabSz="914400" rtl="0" eaLnBrk="1" fontAlgn="auto" latinLnBrk="0" hangingPunct="1">
-              <a:lnSpc>
-                <a:spcPct val="100000"/>
-              </a:lnSpc>
-              <a:spcBef>
-                <a:spcPts val="0"/>
-              </a:spcBef>
-              <a:spcAft>
-                <a:spcPts val="0"/>
-              </a:spcAft>
-              <a:buClrTx/>
-              <a:buSzTx/>
-              <a:buFontTx/>
-              <a:buNone/>
-              <a:tabLst/>
-              <a:defRPr/>
-            </a:pPr>
-            <a:r>
-              <a:rPr lang="fr-FR" sz="1200" b="1" dirty="0">
-                <a:latin typeface="Arial" panose="020B0604020202020204" pitchFamily="34" charset="0"/>
-                <a:ea typeface="+mn-lt"/>
-                <a:cs typeface="Arial" panose="020B0604020202020204" pitchFamily="34" charset="0"/>
-              </a:rPr>
-              <a:t>regroupe 1 300 collaborateurs de La Mutuelle Générale</a:t>
-            </a:r>
-            <a:endParaRPr lang="fr-FR" sz="1200" dirty="0">
-              <a:solidFill>
-                <a:srgbClr val="282727"/>
-              </a:solidFill>
-              <a:ea typeface="+mn-lt"/>
-              <a:cs typeface="+mn-lt"/>
-            </a:endParaRPr>
-          </a:p>
-          <a:p>
-            <a:pPr lvl="1"/>
-            <a:r>
-              <a:rPr lang="fr-FR" sz="1200" dirty="0">
-                <a:solidFill>
-                  <a:srgbClr val="282727"/>
-                </a:solidFill>
-                <a:ea typeface="+mn-lt"/>
-                <a:cs typeface="+mn-lt"/>
-              </a:rPr>
-              <a:t>Augmentations du chiffres d’affaire de 8,6%</a:t>
-            </a:r>
-          </a:p>
-          <a:p>
-            <a:pPr lvl="1"/>
-            <a:r>
-              <a:rPr lang="fr-FR" dirty="0"/>
-              <a:t>Domaine d'activité</a:t>
-            </a:r>
-            <a:endParaRPr lang="fr-FR" sz="1200" dirty="0">
-              <a:solidFill>
-                <a:srgbClr val="282727"/>
-              </a:solidFill>
-              <a:ea typeface="+mn-lt"/>
-              <a:cs typeface="+mn-lt"/>
-            </a:endParaRPr>
-          </a:p>
-          <a:p>
-            <a:pPr algn="l"/>
-            <a:r>
-              <a:rPr lang="fr-FR" sz="1200" b="1" dirty="0"/>
-              <a:t>Santé:</a:t>
-            </a:r>
-          </a:p>
-          <a:p>
-            <a:pPr marL="457200" indent="-457200">
-              <a:buFont typeface="Courier New"/>
-              <a:buChar char="o"/>
-            </a:pPr>
-            <a:r>
-              <a:rPr lang="fr-FR" sz="1200" dirty="0">
-                <a:ea typeface="+mn-lt"/>
-                <a:cs typeface="+mn-lt"/>
-              </a:rPr>
-              <a:t>Complémentaires santé individuelles et collectifs</a:t>
-            </a:r>
-          </a:p>
-          <a:p>
-            <a:pPr marL="457200" indent="-457200">
-              <a:buFont typeface="Courier New"/>
-              <a:buChar char="o"/>
-            </a:pPr>
-            <a:r>
-              <a:rPr lang="fr-FR" sz="1200" dirty="0">
-                <a:ea typeface="+mn-lt"/>
-                <a:cs typeface="+mn-lt"/>
-              </a:rPr>
-              <a:t>Couverture des frais médicaux, hospitalisation, soins courants</a:t>
-            </a:r>
-          </a:p>
-          <a:p>
-            <a:r>
-              <a:rPr lang="fr-FR" sz="1200" b="1" dirty="0">
-                <a:ea typeface="+mn-lt"/>
-                <a:cs typeface="+mn-lt"/>
-              </a:rPr>
-              <a:t>Prévoyance:</a:t>
-            </a:r>
-          </a:p>
-          <a:p>
-            <a:pPr marL="457200" indent="-457200">
-              <a:buFont typeface="Courier New"/>
-              <a:buChar char="o"/>
-            </a:pPr>
-            <a:r>
-              <a:rPr lang="fr-FR" sz="1200" dirty="0">
-                <a:ea typeface="+mn-lt"/>
-                <a:cs typeface="+mn-lt"/>
-              </a:rPr>
-              <a:t>Prévoyance individuelle et collective </a:t>
-            </a:r>
-          </a:p>
-          <a:p>
             <a:endParaRPr lang="fr-FR" dirty="0"/>
           </a:p>
         </p:txBody>
@@ -1987,50 +1838,6 @@
         <p:txBody>
           <a:bodyPr/>
           <a:lstStyle/>
-          <a:p>
-            <a:r>
-              <a:rPr lang="fr-FR" dirty="0"/>
-              <a:t>Qu'est-ce que j'ai fait durant mon stage?</a:t>
-            </a:r>
-          </a:p>
-          <a:p>
-            <a:r>
-              <a:rPr lang="fr-FR" dirty="0"/>
-              <a:t>2 jours à l'entreprise et 3 jours en télétravail</a:t>
-            </a:r>
-          </a:p>
-          <a:p>
-            <a:r>
-              <a:rPr lang="fr-FR" dirty="0"/>
-              <a:t>Lecture de documentation puis en faire la synthèse pour montrer que j'ai bien compris les concept utiliser(par exemple les PFI)</a:t>
-            </a:r>
-          </a:p>
-          <a:p>
-            <a:r>
-              <a:rPr lang="fr-FR" dirty="0"/>
-              <a:t>Explication des programmes utiliser dans l'entreprises (azure </a:t>
-            </a:r>
-            <a:r>
-              <a:rPr lang="fr-FR" dirty="0" err="1"/>
-              <a:t>Devops</a:t>
-            </a:r>
-            <a:r>
-              <a:rPr lang="fr-FR" dirty="0"/>
-              <a:t>, les API)</a:t>
-            </a:r>
-          </a:p>
-          <a:p>
-            <a:r>
-              <a:rPr lang="fr-FR" dirty="0"/>
-              <a:t>Découvertes d'autres services</a:t>
-            </a:r>
-          </a:p>
-          <a:p>
-            <a:r>
-              <a:rPr lang="fr-FR" dirty="0"/>
-              <a:t>Projet d'export data confié qui a duré pendant l'ensemble de mon stage</a:t>
-            </a:r>
-          </a:p>
           <a:p>
             <a:endParaRPr lang="fr-FR" dirty="0"/>
           </a:p>
@@ -2316,7 +2123,7 @@
           <a:p>
             <a:fld id="{C128FA71-3A18-48C0-980F-4B68F7F63042}" type="datetime1">
               <a:rPr lang="en-US" smtClean="0"/>
-              <a:t>5/4/2026</a:t>
+              <a:t>5/5/2026</a:t>
             </a:fld>
             <a:endParaRPr lang="en-US"/>
           </a:p>
@@ -2524,7 +2331,7 @@
           <a:p>
             <a:fld id="{7104EDB3-C0E8-45F8-9E1D-1B6C8D1880C0}" type="datetime1">
               <a:rPr lang="en-US" smtClean="0"/>
-              <a:t>5/4/2026</a:t>
+              <a:t>5/5/2026</a:t>
             </a:fld>
             <a:endParaRPr lang="en-US"/>
           </a:p>
@@ -2732,7 +2539,7 @@
           <a:p>
             <a:fld id="{9CF0EC4B-54ED-4041-B552-9BA760FA3DBA}" type="datetime1">
               <a:rPr lang="en-US" smtClean="0"/>
-              <a:t>5/4/2026</a:t>
+              <a:t>5/5/2026</a:t>
             </a:fld>
             <a:endParaRPr lang="en-US"/>
           </a:p>
@@ -2930,7 +2737,7 @@
           <a:p>
             <a:fld id="{51C1210E-201E-4473-82AC-2466F5386C38}" type="datetime1">
               <a:rPr lang="en-US" smtClean="0"/>
-              <a:t>5/4/2026</a:t>
+              <a:t>5/5/2026</a:t>
             </a:fld>
             <a:endParaRPr lang="en-US"/>
           </a:p>
@@ -3207,7 +3014,7 @@
           <a:p>
             <a:fld id="{B01EA198-6CAB-4B8F-B93F-1F9C8C4B6CE7}" type="datetime1">
               <a:rPr lang="en-US" smtClean="0"/>
-              <a:t>5/4/2026</a:t>
+              <a:t>5/5/2026</a:t>
             </a:fld>
             <a:endParaRPr lang="en-US"/>
           </a:p>
@@ -3477,7 +3284,7 @@
           <a:p>
             <a:fld id="{CA06041F-4525-44D5-AA4F-332294BF1F56}" type="datetime1">
               <a:rPr lang="en-US" smtClean="0"/>
-              <a:t>5/4/2026</a:t>
+              <a:t>5/5/2026</a:t>
             </a:fld>
             <a:endParaRPr lang="en-US"/>
           </a:p>
@@ -3899,7 +3706,7 @@
           <a:p>
             <a:fld id="{F9557091-BBDF-4EB9-BA6B-2BB67AC4FC0F}" type="datetime1">
               <a:rPr lang="en-US" smtClean="0"/>
-              <a:t>5/4/2026</a:t>
+              <a:t>5/5/2026</a:t>
             </a:fld>
             <a:endParaRPr lang="en-US"/>
           </a:p>
@@ -4040,7 +3847,7 @@
           <a:p>
             <a:fld id="{2D6B226B-77A6-410C-9796-083F278E0125}" type="datetime1">
               <a:rPr lang="en-US" smtClean="0"/>
-              <a:t>5/4/2026</a:t>
+              <a:t>5/5/2026</a:t>
             </a:fld>
             <a:endParaRPr lang="en-US"/>
           </a:p>
@@ -4153,7 +3960,7 @@
           <a:p>
             <a:fld id="{A23A578B-D289-4C40-8593-3D356C49DA58}" type="datetime1">
               <a:rPr lang="en-US" smtClean="0"/>
-              <a:t>5/4/2026</a:t>
+              <a:t>5/5/2026</a:t>
             </a:fld>
             <a:endParaRPr lang="en-US"/>
           </a:p>
@@ -4470,7 +4277,7 @@
           <a:p>
             <a:fld id="{713DFAE3-14DB-48A7-A80F-80DDB072CE3D}" type="datetime1">
               <a:rPr lang="en-US" smtClean="0"/>
-              <a:t>5/4/2026</a:t>
+              <a:t>5/5/2026</a:t>
             </a:fld>
             <a:endParaRPr lang="en-US"/>
           </a:p>
@@ -4763,7 +4570,7 @@
           <a:p>
             <a:fld id="{92C5EAEF-6478-4102-8F5D-A5FE9FC97ACB}" type="datetime1">
               <a:rPr lang="en-US" smtClean="0"/>
-              <a:t>5/4/2026</a:t>
+              <a:t>5/5/2026</a:t>
             </a:fld>
             <a:endParaRPr lang="en-US"/>
           </a:p>
@@ -5002,7 +4809,7 @@
           <a:p>
             <a:fld id="{67F45AC6-C491-4585-A584-9CE2AF7D5500}" type="datetime1">
               <a:rPr lang="en-US" smtClean="0"/>
-              <a:t>5/4/2026</a:t>
+              <a:t>5/5/2026</a:t>
             </a:fld>
             <a:endParaRPr lang="en-US"/>
           </a:p>
